--- a/docs/교재/통합반/06일차/통합반_06일차.pptx
+++ b/docs/교재/통합반/06일차/통합반_06일차.pptx
@@ -924,7 +924,7 @@
           <a:lstStyle/>
           <a:p>
             <a:r>
-              <a:t>한 사건 안에 절차가 둘 쓰였습니다. 왼쪽 구간에서는 에이전트가 스킬을 읽고 조회와 계산을 해서 조치 카드를 냈습니다. 운전원이 팬 최대 운전을 승인한 뒤의 오른쪽 구간에서는 SOP-COOL-11이 설비에 할 일, 곧 팬 속도를 100 %로 올리는 작업을 정했습니다. 두 절차가 쓰인 때는 사람의 승인을 사이에 두고 갈립니다.</a:t>
+              <a:t>한 사건 안에 절차가 둘 쓰였습니다. 왼쪽 구간에서는 에이전트가 스킬을 읽고 조회와 계산을 해서 추천안을 냈습니다. 운전원이 팬 최대 운전을 승인한 뒤의 오른쪽 구간에서는 SOP-COOL-11이 설비에 할 일, 곧 팬 속도를 100 %로 올리는 작업을 정했습니다. 두 절차가 쓰인 때는 사람의 승인을 사이에 두고 갈립니다.</a:t>
             </a:r>
           </a:p>
         </p:txBody>
@@ -1344,7 +1344,7 @@
           <a:lstStyle/>
           <a:p>
             <a:r>
-              <a:t>지난 시간에 본 에이전트의 실행 고리에서 시작하겠습니다. HYD-01의 쿨러 성능 저하 경보가 오면 에이전트는 도구를 불러 지식 그래프와 시계열 DB와 업무 DB에서 근거를 얻고, 돌아온 결과를 보고 다음 호출을 정합니다. 이 반복의 끝에 추천 하나와 대안을 담은 조치 카드 묶음이 나옵니다.</a:t>
+              <a:t>지난 시간에 본 에이전트의 실행 고리에서 시작하겠습니다. HYD-01의 쿨러 성능 저하 경보가 오면 에이전트는 도구를 불러 지식 그래프와 시계열 DB와 업무 DB에서 근거를 얻고, 돌아온 결과를 보고 다음 호출을 정합니다. 이 반복의 끝에 추천 하나와 대안을 담은 추천안이 나옵니다.</a:t>
             </a:r>
           </a:p>
         </p:txBody>
@@ -3304,7 +3304,7 @@
           <a:lstStyle/>
           <a:p>
             <a:r>
-              <a:t>hyd-dmn의 도구 가운데 하나뿐인 쓰기가 submit_decision이었습니다. 이 도구가 쓰는 것은 사람이 고를 조치 카드이고 설비는 건드리지 않습니다. 설비 명령은 담당자가 승인한 뒤에 시스템이 만들고, 작업지시와 메일도 승인 뒤의 시스템 단계가 맡습니다. 메일을 보내는 send_mail은 에이전트에 아예 연결하지 않습니다.</a:t>
+              <a:t>hyd-dmn의 도구 가운데 하나뿐인 쓰기가 submit_decision이었습니다. 이 도구가 쓰는 것은 사람이 고를 추천안이고 설비는 건드리지 않습니다. 설비 명령은 담당자가 승인한 뒤에 시스템이 만들고, 작업지시와 메일도 승인 뒤의 시스템 단계가 맡습니다. 메일을 보내는 send_mail은 에이전트에 아예 연결하지 않습니다.</a:t>
             </a:r>
           </a:p>
         </p:txBody>
@@ -4214,7 +4214,7 @@
           <a:lstStyle/>
           <a:p>
             <a:r>
-              <a:t>셋째 실습에서는 스킬을 직접 씁니다. 예제 회의록에서 결정사항과 담당자와 완료 시점을 뽑는 SKILL.md를 작성합니다. 담당자나 기한이 적혀 있지 않은 항목은 지어내지 않고 미정으로 표시하도록 예외 지침을 넣습니다. 그 스킬로 만든 작업 목록을 회의록과 대조해 검토하면 요약이 아니라 다음 행동이 남습니다.</a:t>
+              <a:t>셋째 실습에서는 스킬을 직접 씁니다. 예제 회의록에서 결정사항과 담당자와 기한을 뽑는 SKILL.md를 작성합니다. 담당자나 기한이 적혀 있지 않은 항목은 지어내지 않고 미정으로 표시하도록 예외 지침을 넣습니다. 그 스킬로 만든 작업 목록을 회의록과 대조해 검토하면 요약이 아니라 다음 행동이 남습니다.</a:t>
             </a:r>
           </a:p>
         </p:txBody>
@@ -12422,7 +12422,7 @@
       </p:sp>
       <p:pic>
         <p:nvPicPr>
-          <p:cNvPr id="6" name="삽화:스킬문서.svg" descr="illust_9132262602517438565_1791735675.png"/>
+          <p:cNvPr id="6" name="삽화:스킬문서.svg" descr="illust_4198875467407339543_1791735675.png"/>
           <p:cNvPicPr>
             <a:picLocks noChangeAspect="1"/>
           </p:cNvPicPr>
@@ -14782,7 +14782,7 @@
       </p:sp>
       <p:pic>
         <p:nvPicPr>
-          <p:cNvPr id="6" name="삽화:절차호출.svg" descr="illust_7405620805445814416_1791735675.png"/>
+          <p:cNvPr id="6" name="삽화:절차호출.svg" descr="illust_3311024882847178626_1791735675.png"/>
           <p:cNvPicPr>
             <a:picLocks noChangeAspect="1"/>
           </p:cNvPicPr>
@@ -15419,7 +15419,7 @@
       </p:sp>
       <p:pic>
         <p:nvPicPr>
-          <p:cNvPr id="6" name="삽화:두절차.svg" descr="illust_1453829488486027203_1791735675.png"/>
+          <p:cNvPr id="6" name="삽화:두절차.svg" descr="illust_7973238945333436833_1791735675.png"/>
           <p:cNvPicPr>
             <a:picLocks noChangeAspect="1"/>
           </p:cNvPicPr>
@@ -15751,7 +15751,7 @@
                 <a:ea typeface="맑은 고딕"/>
                 <a:cs typeface="맑은 고딕"/>
               </a:rPr>
-              <a:t>조치 카드</a:t>
+              <a:t>추천안</a:t>
             </a:r>
           </a:p>
         </p:txBody>
@@ -19883,7 +19883,7 @@
       </p:sp>
       <p:pic>
         <p:nvPicPr>
-          <p:cNvPr id="6" name="삽화:재사용.svg" descr="illust_4112593839154156006_1791735675.png"/>
+          <p:cNvPr id="6" name="삽화:재사용.svg" descr="illust_6961674543314115790_1791735675.png"/>
           <p:cNvPicPr>
             <a:picLocks noChangeAspect="1"/>
           </p:cNvPicPr>
@@ -24924,7 +24924,7 @@
       </p:sp>
       <p:pic>
         <p:nvPicPr>
-          <p:cNvPr id="6" name="삽화:연결의수.svg" descr="illust_9180568453612884358_1791735675.png"/>
+          <p:cNvPr id="6" name="삽화:연결의수.svg" descr="illust_3815230011840247775_1791735675.png"/>
           <p:cNvPicPr>
             <a:picLocks noChangeAspect="1"/>
           </p:cNvPicPr>
@@ -26730,7 +26730,7 @@
       </p:sp>
       <p:pic>
         <p:nvPicPr>
-          <p:cNvPr id="6" name="삽화:MCP구성.svg" descr="illust_4609528894433257510_1791735675.png"/>
+          <p:cNvPr id="6" name="삽화:MCP구성.svg" descr="illust_393589425309698825_1791735675.png"/>
           <p:cNvPicPr>
             <a:picLocks noChangeAspect="1"/>
           </p:cNvPicPr>
@@ -29395,7 +29395,7 @@
       </p:sp>
       <p:pic>
         <p:nvPicPr>
-          <p:cNvPr id="6" name="삽화:목록호출.svg" descr="illust_7578744967354260090_1791735675.png"/>
+          <p:cNvPr id="6" name="삽화:목록호출.svg" descr="illust_1386089882614669638_1791735675.png"/>
           <p:cNvPicPr>
             <a:picLocks noChangeAspect="1"/>
           </p:cNvPicPr>
@@ -34268,7 +34268,7 @@
       </p:sp>
       <p:pic>
         <p:nvPicPr>
-          <p:cNvPr id="6" name="삽화:연결방식.svg" descr="illust_3928683006036725448_1791735675.png"/>
+          <p:cNvPr id="6" name="삽화:연결방식.svg" descr="illust_4856110715418576493_1791735675.png"/>
           <p:cNvPicPr>
             <a:picLocks noChangeAspect="1"/>
           </p:cNvPicPr>
@@ -41757,7 +41757,7 @@
       </p:sp>
       <p:pic>
         <p:nvPicPr>
-          <p:cNvPr id="6" name="삽화:세겹.svg" descr="illust_6092820783999238043_1791735675.png"/>
+          <p:cNvPr id="6" name="삽화:세겹.svg" descr="illust_8912891369473659152_1791735675.png"/>
           <p:cNvPicPr>
             <a:picLocks noChangeAspect="1"/>
           </p:cNvPicPr>
@@ -43073,7 +43073,7 @@
       </p:sp>
       <p:pic>
         <p:nvPicPr>
-          <p:cNvPr id="6" name="삽화:고리_0.svg" descr="illust_3940272778761100889_1791735675.png"/>
+          <p:cNvPr id="6" name="삽화:고리_0.svg" descr="illust_674792345056815409_1791735675.png"/>
           <p:cNvPicPr>
             <a:picLocks noChangeAspect="1"/>
           </p:cNvPicPr>
@@ -43510,7 +43510,7 @@
                 <a:ea typeface="맑은 고딕"/>
                 <a:cs typeface="맑은 고딕"/>
               </a:rPr>
-              <a:t>조치 카드 묶음</a:t>
+              <a:t>추천안</a:t>
             </a:r>
           </a:p>
           <a:p>
@@ -43873,7 +43873,7 @@
                 <a:ea typeface="맑은 고딕"/>
                 <a:cs typeface="맑은 고딕"/>
               </a:rPr>
-              <a:t>• 사람이 고를 조치 카드를 기록한다</a:t>
+              <a:t>• 사람이 고를 추천안을 기록한다</a:t>
             </a:r>
           </a:p>
           <a:p>
@@ -46146,7 +46146,7 @@
       </p:sp>
       <p:pic>
         <p:nvPicPr>
-          <p:cNvPr id="6" name="삽화:비밀값.svg" descr="illust_8869322756796433668_1791735675.png"/>
+          <p:cNvPr id="6" name="삽화:비밀값.svg" descr="illust_1686584385174552206_1791735675.png"/>
           <p:cNvPicPr>
             <a:picLocks noChangeAspect="1"/>
           </p:cNvPicPr>
@@ -55490,7 +55490,7 @@
                 <a:ea typeface="맑은 고딕"/>
                 <a:cs typeface="맑은 고딕"/>
               </a:rPr>
-              <a:t>회의록에서 결정사항, 담당자, 완료 시점을 뽑는 SKILL.md를 작성한다</a:t>
+              <a:t>회의록에서 결정사항, 담당자, 기한을 뽑는 SKILL.md를 작성한다</a:t>
             </a:r>
           </a:p>
         </p:txBody>
@@ -55811,7 +55811,7 @@
                 <a:ea typeface="맑은 고딕"/>
                 <a:cs typeface="맑은 고딕"/>
               </a:rPr>
-              <a:t>회의록에서 결정사항, 담당자, 완료 시점을 뽑는 절차와 결과의 모양을 적는다</a:t>
+              <a:t>회의록에서 결정사항, 담당자, 기한을 뽑는 절차와 결과의 모양을 적는다</a:t>
             </a:r>
           </a:p>
         </p:txBody>
@@ -59053,7 +59053,7 @@
       </p:sp>
       <p:pic>
         <p:nvPicPr>
-          <p:cNvPr id="6" name="삽화:고리_1.svg" descr="illust_5733331904215698926_1791735675.png"/>
+          <p:cNvPr id="6" name="삽화:고리_1.svg" descr="illust_155158481207844697_1791735675.png"/>
           <p:cNvPicPr>
             <a:picLocks noChangeAspect="1"/>
           </p:cNvPicPr>
@@ -59427,7 +59427,7 @@
                 <a:ea typeface="맑은 고딕"/>
                 <a:cs typeface="맑은 고딕"/>
               </a:rPr>
-              <a:t>조치 카드 묶음</a:t>
+              <a:t>추천안</a:t>
             </a:r>
           </a:p>
         </p:txBody>

--- a/docs/교재/통합반/06일차/통합반_06일차.pptx
+++ b/docs/교재/통합반/06일차/통합반_06일차.pptx
@@ -3654,7 +3654,7 @@
           <a:lstStyle/>
           <a:p>
             <a:r>
-              <a:t>그렇게 적어 둔 지침을 에이전트 스킬, Agent Skill이라고 합니다. 스킬의 본체는 SKILL.md라는 파일 하나이고, 스킬 이름과 같은 폴더 안에 놓입니다. HYD에서 쿨러 과열 경보에 쓰는 스킬의 이름은 cooling-emergency-response입니다.</a:t>
+              <a:t>그렇게 적어 둔 지침을 에이전트 스킬, Agent Skill이라고 합니다. 스킬의 본체는 SKILL.md라는 파일 하나이고, 스킬 이름과 같은 폴더 안에 놓입니다. HYD에서 쿨러 성능 저하 경보에 쓰는 스킬의 이름은 cooling-emergency-response입니다.</a:t>
             </a:r>
           </a:p>
         </p:txBody>
@@ -12422,7 +12422,7 @@
       </p:sp>
       <p:pic>
         <p:nvPicPr>
-          <p:cNvPr id="6" name="삽화:스킬문서.svg" descr="illust_4198875467407339543_1791735675.png"/>
+          <p:cNvPr id="6" name="삽화:스킬문서.svg" descr="illust_3989150293804148844_1791735675.png"/>
           <p:cNvPicPr>
             <a:picLocks noChangeAspect="1"/>
           </p:cNvPicPr>
@@ -14782,7 +14782,7 @@
       </p:sp>
       <p:pic>
         <p:nvPicPr>
-          <p:cNvPr id="6" name="삽화:절차호출.svg" descr="illust_3311024882847178626_1791735675.png"/>
+          <p:cNvPr id="6" name="삽화:절차호출.svg" descr="illust_1033899669432007921_1791735675.png"/>
           <p:cNvPicPr>
             <a:picLocks noChangeAspect="1"/>
           </p:cNvPicPr>
@@ -15419,7 +15419,7 @@
       </p:sp>
       <p:pic>
         <p:nvPicPr>
-          <p:cNvPr id="6" name="삽화:두절차.svg" descr="illust_7973238945333436833_1791735675.png"/>
+          <p:cNvPr id="6" name="삽화:두절차.svg" descr="illust_5574113046848580904_1791735675.png"/>
           <p:cNvPicPr>
             <a:picLocks noChangeAspect="1"/>
           </p:cNvPicPr>
@@ -17969,7 +17969,7 @@
                 <a:ea typeface="맑은 고딕"/>
                 <a:cs typeface="맑은 고딕"/>
               </a:rPr>
-              <a:t>• 스킬 파일의 머리말, 절차, 결과가 맡는 일을 원문에서 짚는다</a:t>
+              <a:t>• 스킬 파일의 머리말과 절차, 결과가 맡는 일을 원문에서 짚는다</a:t>
             </a:r>
           </a:p>
           <a:p>
@@ -18209,7 +18209,7 @@
                 <a:ea typeface="맑은 고딕"/>
                 <a:cs typeface="맑은 고딕"/>
               </a:rPr>
-              <a:t>• 호스트, 클라이언트, 서버, 도구의 관계를 설명한다</a:t>
+              <a:t>• 호스트와 클라이언트, 서버와 도구의 관계를 설명한다</a:t>
             </a:r>
           </a:p>
           <a:p>
@@ -19883,7 +19883,7 @@
       </p:sp>
       <p:pic>
         <p:nvPicPr>
-          <p:cNvPr id="6" name="삽화:재사용.svg" descr="illust_6961674543314115790_1791735675.png"/>
+          <p:cNvPr id="6" name="삽화:재사용.svg" descr="illust_3388609889502163782_1791735675.png"/>
           <p:cNvPicPr>
             <a:picLocks noChangeAspect="1"/>
           </p:cNvPicPr>
@@ -24924,7 +24924,7 @@
       </p:sp>
       <p:pic>
         <p:nvPicPr>
-          <p:cNvPr id="6" name="삽화:연결의수.svg" descr="illust_3815230011840247775_1791735675.png"/>
+          <p:cNvPr id="6" name="삽화:연결의수.svg" descr="illust_2977347067230729768_1791735675.png"/>
           <p:cNvPicPr>
             <a:picLocks noChangeAspect="1"/>
           </p:cNvPicPr>
@@ -26730,7 +26730,7 @@
       </p:sp>
       <p:pic>
         <p:nvPicPr>
-          <p:cNvPr id="6" name="삽화:MCP구성.svg" descr="illust_393589425309698825_1791735675.png"/>
+          <p:cNvPr id="6" name="삽화:MCP구성.svg" descr="illust_8910956164895961044_1791735675.png"/>
           <p:cNvPicPr>
             <a:picLocks noChangeAspect="1"/>
           </p:cNvPicPr>
@@ -29395,7 +29395,7 @@
       </p:sp>
       <p:pic>
         <p:nvPicPr>
-          <p:cNvPr id="6" name="삽화:목록호출.svg" descr="illust_1386089882614669638_1791735675.png"/>
+          <p:cNvPr id="6" name="삽화:목록호출.svg" descr="illust_2160144690690242130_1791735675.png"/>
           <p:cNvPicPr>
             <a:picLocks noChangeAspect="1"/>
           </p:cNvPicPr>
@@ -34268,7 +34268,7 @@
       </p:sp>
       <p:pic>
         <p:nvPicPr>
-          <p:cNvPr id="6" name="삽화:연결방식.svg" descr="illust_4856110715418576493_1791735675.png"/>
+          <p:cNvPr id="6" name="삽화:연결방식.svg" descr="illust_6646713548768719804_1791735675.png"/>
           <p:cNvPicPr>
             <a:picLocks noChangeAspect="1"/>
           </p:cNvPicPr>
@@ -41757,7 +41757,7 @@
       </p:sp>
       <p:pic>
         <p:nvPicPr>
-          <p:cNvPr id="6" name="삽화:세겹.svg" descr="illust_8912891369473659152_1791735675.png"/>
+          <p:cNvPr id="6" name="삽화:세겹.svg" descr="illust_712004416715373490_1791735675.png"/>
           <p:cNvPicPr>
             <a:picLocks noChangeAspect="1"/>
           </p:cNvPicPr>
@@ -43073,7 +43073,7 @@
       </p:sp>
       <p:pic>
         <p:nvPicPr>
-          <p:cNvPr id="6" name="삽화:고리_0.svg" descr="illust_674792345056815409_1791735675.png"/>
+          <p:cNvPr id="6" name="삽화:고리_0.svg" descr="illust_6034218235771077890_1791735675.png"/>
           <p:cNvPicPr>
             <a:picLocks noChangeAspect="1"/>
           </p:cNvPicPr>
@@ -46146,7 +46146,7 @@
       </p:sp>
       <p:pic>
         <p:nvPicPr>
-          <p:cNvPr id="6" name="삽화:비밀값.svg" descr="illust_1686584385174552206_1791735675.png"/>
+          <p:cNvPr id="6" name="삽화:비밀값.svg" descr="illust_6178772601979352831_1791735675.png"/>
           <p:cNvPicPr>
             <a:picLocks noChangeAspect="1"/>
           </p:cNvPicPr>
@@ -59053,7 +59053,7 @@
       </p:sp>
       <p:pic>
         <p:nvPicPr>
-          <p:cNvPr id="6" name="삽화:고리_1.svg" descr="illust_155158481207844697_1791735675.png"/>
+          <p:cNvPr id="6" name="삽화:고리_1.svg" descr="illust_1135745551840253754_1791735675.png"/>
           <p:cNvPicPr>
             <a:picLocks noChangeAspect="1"/>
           </p:cNvPicPr>
@@ -63254,7 +63254,7 @@
                 <a:ea typeface="맑은 고딕"/>
                 <a:cs typeface="맑은 고딕"/>
               </a:rPr>
-              <a:t>쿨러 과열 경보에 쓰는 스킬의 이름은 cooling-emergency-response이다.</a:t>
+              <a:t>쿨러 성능 저하 경보에 쓰는 스킬의 이름은 cooling-emergency-response이다.</a:t>
             </a:r>
           </a:p>
         </p:txBody>

--- a/docs/교재/통합반/06일차/통합반_06일차.pptx
+++ b/docs/교재/통합반/06일차/통합반_06일차.pptx
@@ -574,7 +574,7 @@
           <a:lstStyle/>
           <a:p>
             <a:r>
-              <a:t>지난 시간에는 에이전트가 도구를 부르며 일하는 모습을 보았습니다. 오늘은 그 에이전트가 일하는 방법을 어디에 적어 두는지, 도구는 어떻게 연결되는지, 연결할 때 무엇을 지켜야 하는지를 차례로 다룹니다. 이 네 가지를 자료 없이 자신의 말로 설명할 수 있는지가 오늘의 기준입니다.</a:t>
+              <a:t>지난 시간에는 에이전트가 도구를 부르며 일하는 모습을 보았습니다. 오늘은 그 에이전트가 일하는 방법을 어디에 적어 두는지, 도구는 어떻게 연결되는지, 연결할 때 무엇을 지켜야 하는지를 차례로 다룹니다. 수업이 끝났을 때 SKILL.md 한 편과 서버 설정 한 건을 놓고 어디에 무엇이 적혀 있는지를 짚을 수 있어야 합니다.</a:t>
             </a:r>
           </a:p>
         </p:txBody>
@@ -784,7 +784,7 @@
           <a:lstStyle/>
           <a:p>
             <a:r>
-              <a:t>위는 SKILL.md의 결과 절이고 아래는 에이전트가 실제로 쓴 출력 파일입니다. 결과 절에 적힌 다섯 항목이 출력의 최상위 항목과 하나씩 맞습니다. 항목의 이름이 정해져 있어서 사람에게 승인을 받는 다음 단계가 실행마다 같은 이름으로 값을 읽습니다. 추천 값 skill:sop-cool-11은 팬 최대 운전을 가리키는 식별자입니다.</a:t>
+              <a:t>위는 SKILL.md의 결과 절이고 아래는 에이전트가 실제로 쓴 출력 파일입니다. 구조화 출력의 다섯 항목은 이 결과 절이 이름을 정해 둔 것이어서, 사람에게 승인을 받는 다음 단계가 실행마다 같은 이름으로 값을 읽습니다. 추천 값 skill:sop-cool-11은 팬 최대 운전을 가리키는 식별자입니다. 이 파일은 같은 스킬로 처리한 같은 종류의 다른 쿨러 경보 한 건의 기록이어서, 판단 번호가 앞에서 본 사건의 것과 다릅니다.</a:t>
             </a:r>
           </a:p>
         </p:txBody>
@@ -1414,7 +1414,7 @@
           <a:lstStyle/>
           <a:p>
             <a:r>
-              <a:t>HYD에는 스킬이 셋 있습니다. 쿨러 과열 경보, 정기 정비 도래, 예비품 재고 기준 이탈을 각각 맡습니다. 세 파일 모두 머리말과 절차와 결과로 이루어져 틀이 같고, 사실을 확인하는 단계에서 부르는 도구가 업무에 맞게 다릅니다. 새 업무를 맡길 때도 같은 틀에 그 업무의 절차를 적으면 됩니다.</a:t>
+              <a:t>HYD에는 스킬이 셋 있습니다. 쿨러 성능 저하 경보, 정기 정비 도래, 예비품 재고 기준 이탈을 각각 맡습니다. 가운데 칸은 원문 그대로여서 경보를 쿨러 과열 경보로, 산출물을 카드로 적고 있습니다. 세 파일 모두 머리말과 절차와 결과로 이루어져 틀이 같고, 사실을 확인하는 단계에서 부르는 도구가 업무에 맞게 다릅니다. 새 업무를 맡길 때도 같은 틀에 그 업무의 절차를 적으면 됩니다.</a:t>
             </a:r>
           </a:p>
         </p:txBody>
@@ -1554,7 +1554,7 @@
           <a:lstStyle/>
           <a:p>
             <a:r>
-              <a:t>냉각 긴급 대응 에이전트의 정의를 세 칸으로 보겠습니다. 목표는 무엇을 이룰지를, 스킬은 어떻게 할지를, 도구는 무엇으로 할지를 정합니다. 스킬은 만들어 두기만 해서는 쓰이지 않고 에이전트에 붙여야 실행에 들어갑니다. 스킬의 절차가 부르는 도구는 셋째 칸의 연결이 있어야 실제로 실행됩니다.</a:t>
+              <a:t>냉각 긴급 대응 에이전트의 정의를 세 칸으로 보겠습니다. 목표는 무엇을 이룰지를, 스킬은 어떻게 할지를, 도구는 무엇으로 할지를 정합니다. 목표 칸은 지난 시간에 요지로 본 문장의 원문이며, 원문의 추천 카드가 곧 추천안입니다. 스킬은 만들어 두기만 해서는 쓰이지 않고 에이전트에 붙여야 실행에 들어갑니다. 스킬의 절차가 부르는 도구는 셋째 칸의 연결이 있어야 실제로 실행됩니다.</a:t>
             </a:r>
           </a:p>
         </p:txBody>
@@ -2254,7 +2254,7 @@
           <a:lstStyle/>
           <a:p>
             <a:r>
-              <a:t>도구 목록에 든 항목 하나를 그대로 옮겼습니다. 구매 쪽 서버가 내주는 part_quotes라는 도구입니다. 이름과 설명과 입력 스키마가 있고, 모델은 이 설명을 읽고 지금 이 도구를 부를지를 정합니다. 그래서 도구의 설명은 사람이 읽는 주석이 아니라 모델의 선택을 좌우하는 글입니다.</a:t>
+              <a:t>도구 목록에 든 항목 하나를 그대로 옮겼습니다. 구매 쪽 업무 DB 서버가 내주는 part_quotes라는 도구입니다. 이름과 설명과 입력 스키마가 있고, 모델은 이 설명을 읽고 지금 이 도구를 부를지를 정합니다. 그래서 도구의 설명은 사람이 읽는 주석이 아니라 모델의 선택을 좌우하는 글입니다.</a:t>
             </a:r>
           </a:p>
         </p:txBody>
@@ -2324,7 +2324,7 @@
           <a:lstStyle/>
           <a:p>
             <a:r>
-              <a:t>쿨러 경보에서 에이전트가 실제로 낸 호출 요청입니다. 도구 이름 앞에 서버 이름이 붙어 mcp__hyd-dmn__diagnose가 됩니다. 이름이 같은 도구가 두 서버에 있어도 이 전체 이름으로 구분됩니다. 입력은 스키마가 정한 세 항목을 채운 JSON이고, 설비와 경보 유형과 경보 번호가 들어 있습니다.</a:t>
+              <a:t>지난 시간에 처리 기록에서 「원인 진단」이라는 이름으로 본 호출을 요청의 원래 모양으로 다시 봅니다. 도구 이름 앞에 서버 이름이 붙어 mcp__hyd-dmn__diagnose가 됩니다. 이름이 같은 도구가 두 서버에 있어도 이 전체 이름으로 구분됩니다. 입력은 스키마가 정한 세 항목을 채운 JSON이고, 설비와 경보 유형과 경보 번호가 들어 있습니다.</a:t>
             </a:r>
           </a:p>
         </p:txBody>
@@ -2394,7 +2394,7 @@
           <a:lstStyle/>
           <a:p>
             <a:r>
-              <a:t>업무 DB 서버의 mes_orders를 HYD-01로 불렀을 때 돌아온 응답입니다. 맨 앞의 result가 성공 여부를 알리고, document 안에 읽은 시각과 값이 들어 있습니다. facts는 판단에 바로 쓰는 값이고 records는 업무 DB에서 읽은 원래의 행입니다. 납기 오더 MO-0930-0412가 5.98시간 남았다는 값이 여기서 나왔습니다.</a:t>
+              <a:t>업무 DB 서버의 mes_orders를 HYD-01로 불렀을 때 돌아온 응답입니다. 여기서 볼 것은 값 자체가 아니라 값을 싸고 있는 응답의 모양입니다. 맨 앞의 result가 성공 여부를 알리고, document 안에 값을 읽은 시각 as_of가 들어 있습니다. facts는 판단에 바로 쓰는 값만 추린 자리이고 records는 업무 DB에서 읽은 원래의 행입니다. 납기까지 5.98시간이라는 값은 이 모양에 담겨 돌아온 것입니다.</a:t>
             </a:r>
           </a:p>
         </p:txBody>
@@ -2814,7 +2814,7 @@
           <a:lstStyle/>
           <a:p>
             <a:r>
-              <a:t>쿨러 경보 한 건의 실행 기록을 스킬의 단계에 맞추어 정리했습니다. 2단계의 diagnose는 hyd-dmn 서버가 실행해 원인 1순위를 돌려주었습니다. 3단계의 업무 DB 조회는 enterprise 서버가 맡아 납기 오더와 출하 대기 로트를 돌려주었습니다. 4단계와 5단계는 다시 hyd-dmn 서버가 실행했고, 마지막에 판단 번호가 돌아왔습니다.</a:t>
+              <a:t>앞 단원에서 둘째 경보라고 부른 건의 실행 기록을 스킬의 단계에 맞추어 정리했습니다. 2단계의 diagnose는 hyd-dmn 서버가 실행해 원인 1순위를 돌려주었습니다. 3단계의 업무 DB 조회는 enterprise 서버가 맡아 납기 오더와 출하 대기 로트를 돌려주었습니다. 4단계와 5단계는 다시 hyd-dmn 서버가 실행했고, 마지막에 판단 번호가 돌아왔습니다.</a:t>
             </a:r>
           </a:p>
         </p:txBody>
@@ -3234,7 +3234,7 @@
           <a:lstStyle/>
           <a:p>
             <a:r>
-              <a:t>에이전트에게 주는 허용 목록의 실제 내용입니다. 지식 그래프 쪽은 조회 도구 둘의 이름만 올라 있습니다. 별표는 그 서버의 도구 전부를 뜻하며, 미리 검사해 둔 기준 서버에만 씁니다. 학생이 새로 등록한 서버는 별표를 쓰지 않고 읽기로 인정된 도구의 이름만 하나씩 올립니다.</a:t>
+              <a:t>권한 제한의 기준이 되는 허용 목록의 실제 내용입니다. 지식 그래프 쪽은 조회 도구 둘의 이름만 올라 있습니다. 별표는 그 서버의 도구 전부를 뜻하며, 미리 검사해 둔 기준 서버에만 씁니다. 학생이 새로 등록한 서버는 별표를 쓰지 않고 읽기로 인정된 도구의 이름만 하나씩 올립니다.</a:t>
             </a:r>
           </a:p>
         </p:txBody>
@@ -3304,7 +3304,7 @@
           <a:lstStyle/>
           <a:p>
             <a:r>
-              <a:t>hyd-dmn의 도구 가운데 하나뿐인 쓰기가 submit_decision이었습니다. 이 도구가 쓰는 것은 사람이 고를 추천안이고 설비는 건드리지 않습니다. 설비 명령은 담당자가 승인한 뒤에 시스템이 만들고, 작업지시와 메일도 승인 뒤의 시스템 단계가 맡습니다. 메일을 보내는 send_mail은 에이전트에 아예 연결하지 않습니다.</a:t>
+              <a:t>지난 시간에 본 추천, 승인, 실행의 경계를 연결된 도구로 다시 읽습니다. hyd-dmn의 도구 가운데 하나뿐인 쓰기가 submit_decision이며, 이 도구가 쓰는 것은 사람이 고를 추천안이고 설비는 건드리지 않습니다. 설비 명령과 작업지시는 담당자가 승인한 뒤에 시스템이 만들고, 메일을 보내는 send_mail은 에이전트에 아예 연결하지 않습니다. 경계가 지침의 문장에만 있지 않고 도구의 연결에도 놓여 있는 것입니다.</a:t>
             </a:r>
           </a:p>
         </p:txBody>
@@ -3724,7 +3724,7 @@
           <a:lstStyle/>
           <a:p>
             <a:r>
-              <a:t>도구의 응답이 언제나 온전하게 돌아오는 것은 아닙니다. 쿨러 경보의 한 실행에서 조치 후보를 비교한 응답이 128,466자였고, 너무 커서 본문이 에이전트에게 전달되지 않았습니다. 에이전트는 필요한 항목만 좁혀 다시 조회했고, 열어 보지 못한 출력이 있다는 사실을 마지막 보고에 적었습니다. 받은 만큼만 근거로 쓰고 받지 못한 범위를 밝히는 것이 기준입니다.</a:t>
+              <a:t>도구의 응답이 언제나 온전하게 돌아오는 것은 아닙니다. 지난 시간에 재시도의 장면으로 본 12만 자짜리 응답이 그 예이며, 번호가 다른 두 쿨러 경보의 실행에서 모두 본문이 에이전트에게 전달되지 않았습니다. 첫째 경보의 실행은 필요한 항목만 좁혀 다시 조회했고, 둘째 경보의 실행은 열어 보지 못한 출력이 있다는 사실을 마지막 보고에 적었습니다. 받은 만큼만 근거로 쓰고 받지 못한 범위를 밝히는 것이 기준입니다.</a:t>
             </a:r>
           </a:p>
         </p:txBody>
@@ -3794,7 +3794,7 @@
           <a:lstStyle/>
           <a:p>
             <a:r>
-              <a:t>응답의 네 가지 경우를 구분합니다. 조회가 성공했는데 결과가 0행이면 「없음」이 사실입니다. 호출이 실패했거나 정해진 시간을 넘겼으면 값이 있는지 없는지를 알 수 없으므로 실패로 적어야 합니다. 실패를 0이나 빈 값으로 바꾸면 재고가 없다는 틀린 사실이 판단에 들어갑니다. 응답이 잘렸을 때는 읽지 못한 범위를 밝힙니다.</a:t>
+              <a:t>값이 없는 것과 조회에 실패한 것은 에이전트의 멈춤 조건에서 이미 구분했고, 위의 두 줄이 그것입니다. 도구를 연결해 쓰면 경우가 둘 더 생깁니다. 정해진 시간 안에 응답하지 못한 호출은 오류로 돌아오므로 실패로 적고, 응답이 잘렸을 때는 읽지 못한 범위를 밝힙니다. 어느 경우에도 0이나 빈 값으로 바꾸어 적지 않습니다.</a:t>
             </a:r>
           </a:p>
         </p:txBody>
@@ -3864,7 +3864,7 @@
           <a:lstStyle/>
           <a:p>
             <a:r>
-              <a:t>외부 도구에서 받은 값을 판단에 쓰려면 그 값이 어디서 왔는지를 남겨야 합니다. 호출 기록 한 줄에는 시각과 걸린 시간, 서버와 도구의 이름, 넘긴 입력과 돌아온 원문이 남습니다. 응답 안의 값에는 원천과 관측 시각 같은 출처가 따로 붙습니다. 이 기록이 있어서 사람은 추천을 승인하기 전에 근거를 되짚을 수 있습니다.</a:t>
+              <a:t>지난 시간에 본 실행 기록 한 줄을 근거 표시의 눈으로 다시 읽습니다. 여러 서버를 연결하면 값이 어느 서버의 어느 도구에서 왔는지가 중요해지며, 기록에는 hyd-dmn의 diagnose라는 이름이 남아 있습니다. 응답 안의 값에는 원천과 관측 시각이 따로 붙어서, 납기까지 5.98시간이라는 값이 MES에서 왔다는 것까지 따라갈 수 있습니다. 이 두 겹의 표시가 있어서 사람은 추천을 승인하기 전에 근거를 되짚을 수 있습니다.</a:t>
             </a:r>
           </a:p>
         </p:txBody>
@@ -4354,7 +4354,7 @@
           <a:lstStyle/>
           <a:p>
             <a:r>
-              <a:t>오늘 나온 약어와 영문 용어의 정식 명칭을 한곳에 모았습니다. 이 여섯 개와 함께 호스트, 클라이언트, 서버, 도구, 입력 스키마, 허용 목록, 자리표시자가 오늘의 용어입니다. 하나를 골라 자료를 덮고 자신의 문장으로 써 보시기 바랍니다.</a:t>
+              <a:t>오늘 나온 약어와 영문 용어의 정식 명칭을 한곳에 모았습니다. 이 여섯 개와 함께 호스트, 클라이언트, 서버, 도구, 입력 스키마, 허용 목록, 자리표시자가 오늘의 용어입니다. 용어마다 스킬 쪽의 말인지 연결 쪽의 말인지를 갈라 보시기 바랍니다.</a:t>
             </a:r>
           </a:p>
         </p:txBody>
@@ -4704,7 +4704,7 @@
           <a:lstStyle/>
           <a:p>
             <a:r>
-              <a:t>정답보다 판단 기준이 중요합니다. 첫 문항의 1번과 3번은 스킬을 고치는 일이어서 빠진 연결을 채우지 못합니다. 둘째 문항의 1번은 실패를 값 없음으로 바꾼 것입니다. 셋째 문항의 2번은 표시가 없는 도구를 읽기로 본 것이며, 표시가 없으면 읽는 도구인지 알 수 없으므로 거절됩니다.</a:t>
+              <a:t>오답이 어느 구분을 놓쳤는지를 함께 짚습니다. 첫 문항의 1번과 3번은 스킬을 고치는 일이어서 빠진 연결을 채우지 못합니다. 둘째 문항의 1번은 실패를 값 없음으로 바꾼 것입니다. 셋째 문항의 2번은 표시가 없는 도구를 읽기로 본 것이며, 표시가 없으면 읽는 도구인지 알 수 없으므로 거절됩니다.</a:t>
             </a:r>
           </a:p>
         </p:txBody>
@@ -4774,7 +4774,7 @@
           <a:lstStyle/>
           <a:p>
             <a:r>
-              <a:t>에이전트가 실제로 읽은 SKILL.md의 앞부분입니다. 줄 세 개짜리 구분선 사이가 머리말이고, 이름과 설명 두 항목이 들어 있습니다. 그 아래 본문은 경보 한 건에서 원인을 진단하고 조치 후보를 비교해 추천 카드와 대안을 올린다는 요약으로 시작합니다. 마지막 두 줄은 이 스킬이 조회와 계산까지만 한다는 범위의 한계입니다.</a:t>
+              <a:t>에이전트가 실제로 읽은 SKILL.md의 앞부분입니다. 줄 세 개짜리 구분선 사이가 머리말이고, 이름과 설명 두 항목이 들어 있습니다. 그 아래 본문은 경보 한 건에서 원인을 진단하고 조치 후보를 비교해 추천 카드와 대안을 올린다는 요약으로 시작합니다. 원문의 「추천 카드」가 곧 추천안이고, 「쿨러 과열 경보」는 쿨러 성능 저하 경보를 가리킵니다. 마지막 두 줄은 이 스킬이 조회와 계산까지만 한다는 범위의 한계입니다.</a:t>
             </a:r>
           </a:p>
         </p:txBody>
@@ -12422,7 +12422,7 @@
       </p:sp>
       <p:pic>
         <p:nvPicPr>
-          <p:cNvPr id="6" name="삽화:스킬문서.svg" descr="illust_3989150293804148844_1791735675.png"/>
+          <p:cNvPr id="6" name="삽화:스킬문서.svg" descr="illust_8117605648421484525_1791735675.png"/>
           <p:cNvPicPr>
             <a:picLocks noChangeAspect="1"/>
           </p:cNvPicPr>
@@ -14782,7 +14782,7 @@
       </p:sp>
       <p:pic>
         <p:nvPicPr>
-          <p:cNvPr id="6" name="삽화:절차호출.svg" descr="illust_1033899669432007921_1791735675.png"/>
+          <p:cNvPr id="6" name="삽화:절차호출.svg" descr="illust_8648747231977767948_1791735675.png"/>
           <p:cNvPicPr>
             <a:picLocks noChangeAspect="1"/>
           </p:cNvPicPr>
@@ -15419,7 +15419,7 @@
       </p:sp>
       <p:pic>
         <p:nvPicPr>
-          <p:cNvPr id="6" name="삽화:두절차.svg" descr="illust_5574113046848580904_1791735675.png"/>
+          <p:cNvPr id="6" name="삽화:두절차.svg" descr="illust_5191087343944546913_1791735675.png"/>
           <p:cNvPicPr>
             <a:picLocks noChangeAspect="1"/>
           </p:cNvPicPr>
@@ -19883,7 +19883,7 @@
       </p:sp>
       <p:pic>
         <p:nvPicPr>
-          <p:cNvPr id="6" name="삽화:재사용.svg" descr="illust_3388609889502163782_1791735675.png"/>
+          <p:cNvPr id="6" name="삽화:재사용.svg" descr="illust_65810126516696607_1791735675.png"/>
           <p:cNvPicPr>
             <a:picLocks noChangeAspect="1"/>
           </p:cNvPicPr>
@@ -21199,7 +21199,7 @@
                 <a:ea typeface="맑은 고딕"/>
                 <a:cs typeface="맑은 고딕"/>
               </a:rPr>
-              <a:t>쿨러 과열, 정기 정비, 예비품 구매를 맡는 HYD의 세 스킬은 같은 틀에 업무마다 다른 절차를 담은 것이다.</a:t>
+              <a:t>쿨러 성능 저하 경보, 정기 정비, 예비품 구매를 맡는 HYD의 세 스킬은 같은 틀에 업무마다 다른 절차를 담은 것이다.</a:t>
             </a:r>
           </a:p>
         </p:txBody>
@@ -24924,7 +24924,7 @@
       </p:sp>
       <p:pic>
         <p:nvPicPr>
-          <p:cNvPr id="6" name="삽화:연결의수.svg" descr="illust_2977347067230729768_1791735675.png"/>
+          <p:cNvPr id="6" name="삽화:연결의수.svg" descr="illust_7214765527535850682_1791735675.png"/>
           <p:cNvPicPr>
             <a:picLocks noChangeAspect="1"/>
           </p:cNvPicPr>
@@ -26730,7 +26730,7 @@
       </p:sp>
       <p:pic>
         <p:nvPicPr>
-          <p:cNvPr id="6" name="삽화:MCP구성.svg" descr="illust_8910956164895961044_1791735675.png"/>
+          <p:cNvPr id="6" name="삽화:MCP구성.svg" descr="illust_6199619008749416442_1791735675.png"/>
           <p:cNvPicPr>
             <a:picLocks noChangeAspect="1"/>
           </p:cNvPicPr>
@@ -29395,7 +29395,7 @@
       </p:sp>
       <p:pic>
         <p:nvPicPr>
-          <p:cNvPr id="6" name="삽화:목록호출.svg" descr="illust_2160144690690242130_1791735675.png"/>
+          <p:cNvPr id="6" name="삽화:목록호출.svg" descr="illust_3385069735426759718_1791735675.png"/>
           <p:cNvPicPr>
             <a:picLocks noChangeAspect="1"/>
           </p:cNvPicPr>
@@ -32967,7 +32967,7 @@
                 <a:ea typeface="맑은 고딕"/>
                 <a:cs typeface="맑은 고딕"/>
               </a:rPr>
-              <a:t>호출이 성공했는지를 먼저 알린다.</a:t>
+              <a:t>호출이 성공했는지를 먼저 알린다. 실패하면 error가 온다.</a:t>
             </a:r>
           </a:p>
         </p:txBody>
@@ -33093,7 +33093,7 @@
                 <a:ea typeface="맑은 고딕"/>
                 <a:cs typeface="맑은 고딕"/>
               </a:rPr>
-              <a:t>판단에 쓰는 값이다. 납기까지 5.98시간, 남은 수량 1500.</a:t>
+              <a:t>판단에 쓰는 값만 추린 자리이다.</a:t>
             </a:r>
           </a:p>
         </p:txBody>
@@ -34268,7 +34268,7 @@
       </p:sp>
       <p:pic>
         <p:nvPicPr>
-          <p:cNvPr id="6" name="삽화:연결방식.svg" descr="illust_6646713548768719804_1791735675.png"/>
+          <p:cNvPr id="6" name="삽화:연결방식.svg" descr="illust_7147436185637736293_1791735675.png"/>
           <p:cNvPicPr>
             <a:picLocks noChangeAspect="1"/>
           </p:cNvPicPr>
@@ -37608,7 +37608,7 @@
                 <a:ea typeface="맑은 고딕"/>
                 <a:cs typeface="맑은 고딕"/>
               </a:rPr>
-              <a:t>쿨러 경보의 실행 기록을 스킬의 단계와 나란히 놓으면, 단계마다 어느 서버가 무엇을 돌려주었는지가 드러난다.</a:t>
+              <a:t>둘째 쿨러 경보의 실행 기록을 스킬의 단계와 나란히 놓으면, 단계마다 어느 서버가 무엇을 돌려주었는지가 드러난다.</a:t>
             </a:r>
           </a:p>
         </p:txBody>
@@ -38625,7 +38625,7 @@
                 <a:ea typeface="맑은 고딕"/>
                 <a:cs typeface="맑은 고딕"/>
               </a:rPr>
-              <a:t>02단원 정리: 도구 호출 한 번이 지나가는 길</a:t>
+              <a:t>단원 정리: 도구 호출 한 번이 지나가는 길</a:t>
             </a:r>
           </a:p>
         </p:txBody>
@@ -41757,7 +41757,7 @@
       </p:sp>
       <p:pic>
         <p:nvPicPr>
-          <p:cNvPr id="6" name="삽화:세겹.svg" descr="illust_712004416715373490_1791735675.png"/>
+          <p:cNvPr id="6" name="삽화:세겹.svg" descr="illust_1723677533139300529_1791735675.png"/>
           <p:cNvPicPr>
             <a:picLocks noChangeAspect="1"/>
           </p:cNvPicPr>
@@ -43073,7 +43073,7 @@
       </p:sp>
       <p:pic>
         <p:nvPicPr>
-          <p:cNvPr id="6" name="삽화:고리_0.svg" descr="illust_6034218235771077890_1791735675.png"/>
+          <p:cNvPr id="6" name="삽화:고리_0.svg" descr="illust_3825033042115972106_1791735675.png"/>
           <p:cNvPicPr>
             <a:picLocks noChangeAspect="1"/>
           </p:cNvPicPr>
@@ -43635,7 +43635,7 @@
                 <a:ea typeface="맑은 고딕"/>
                 <a:cs typeface="맑은 고딕"/>
               </a:rPr>
-              <a:t>에이전트의 쓰기는 사람이 고를 안을 제출하는 데까지이고, 설비 명령과 업무 기록은 승인 뒤에 시스템이 수행한다.</a:t>
+              <a:t>에이전트에 연결된 쓰기 도구는 추천안을 제출하는 submit_decision뿐이며, 설비에 명령을 내는 도구는 없다.</a:t>
             </a:r>
           </a:p>
         </p:txBody>
@@ -44629,16 +44629,16 @@
         </p:nvSpPr>
         <p:spPr>
           <a:xfrm>
-            <a:off x="548640" y="2875787"/>
-            <a:ext cx="11094415" cy="347472"/>
+            <a:off x="548640" y="1961388"/>
+            <a:ext cx="11094415" cy="1316736"/>
           </a:xfrm>
           <a:prstGeom prst="roundRect">
             <a:avLst>
-              <a:gd name="adj" fmla="val 12000"/>
+              <a:gd name="adj" fmla="val 6000"/>
             </a:avLst>
           </a:prstGeom>
           <a:solidFill>
-            <a:srgbClr val="13294B"/>
+            <a:srgbClr val="E7F3FD"/>
           </a:solidFill>
           <a:ln>
             <a:noFill/>
@@ -44660,8 +44660,8 @@
         </p:nvSpPr>
         <p:spPr>
           <a:xfrm>
-            <a:off x="685800" y="2875787"/>
-            <a:ext cx="2514600" cy="347472"/>
+            <a:off x="640080" y="1933956"/>
+            <a:ext cx="3291839" cy="1371600"/>
           </a:xfrm>
           <a:prstGeom prst="rect">
             <a:avLst/>
@@ -44676,17 +44676,41 @@
               <a:lnSpc>
                 <a:spcPct val="110000"/>
               </a:lnSpc>
-            </a:pPr>
-            <a:r>
-              <a:rPr sz="1300" b="1">
-                <a:solidFill>
-                  <a:srgbClr val="FFFFFF"/>
-                </a:solidFill>
-                <a:latin typeface="맑은 고딕"/>
-                <a:ea typeface="맑은 고딕"/>
-                <a:cs typeface="맑은 고딕"/>
-              </a:rPr>
-              <a:t>에이전트</a:t>
+              <a:spcAft>
+                <a:spcPts val="200"/>
+              </a:spcAft>
+            </a:pPr>
+            <a:r>
+              <a:rPr sz="1800" b="1">
+                <a:solidFill>
+                  <a:srgbClr val="13294B"/>
+                </a:solidFill>
+                <a:latin typeface="맑은 고딕"/>
+                <a:ea typeface="맑은 고딕"/>
+                <a:cs typeface="맑은 고딕"/>
+              </a:rPr>
+              <a:t>최소 권한 원칙</a:t>
+            </a:r>
+          </a:p>
+          <a:p>
+            <a:pPr algn="l">
+              <a:lnSpc>
+                <a:spcPct val="110000"/>
+              </a:lnSpc>
+              <a:spcAft>
+                <a:spcPts val="200"/>
+              </a:spcAft>
+            </a:pPr>
+            <a:r>
+              <a:rPr sz="1150" b="0">
+                <a:solidFill>
+                  <a:srgbClr val="556175"/>
+                </a:solidFill>
+                <a:latin typeface="맑은 고딕"/>
+                <a:ea typeface="맑은 고딕"/>
+                <a:cs typeface="맑은 고딕"/>
+              </a:rPr>
+              <a:t>Principle of Least Privilege</a:t>
             </a:r>
           </a:p>
         </p:txBody>
@@ -44699,8 +44723,8 @@
         </p:nvSpPr>
         <p:spPr>
           <a:xfrm>
-            <a:off x="3200400" y="2875787"/>
-            <a:ext cx="6248095" cy="347472"/>
+            <a:off x="4023359" y="1933956"/>
+            <a:ext cx="7528255" cy="1371600"/>
           </a:xfrm>
           <a:prstGeom prst="rect">
             <a:avLst/>
@@ -44715,78 +44739,61 @@
               <a:lnSpc>
                 <a:spcPct val="110000"/>
               </a:lnSpc>
-            </a:pPr>
-            <a:r>
-              <a:rPr sz="1300" b="1">
-                <a:solidFill>
-                  <a:srgbClr val="FFFFFF"/>
-                </a:solidFill>
-                <a:latin typeface="맑은 고딕"/>
-                <a:ea typeface="맑은 고딕"/>
-                <a:cs typeface="맑은 고딕"/>
-              </a:rPr>
-              <a:t>연결한 업무 DB 서버</a:t>
-            </a:r>
-          </a:p>
-        </p:txBody>
-      </p:sp>
-      <p:sp>
-        <p:nvSpPr>
-          <p:cNvPr id="9" name="TextBox 8"/>
-          <p:cNvSpPr txBox="1"/>
-          <p:nvPr/>
-        </p:nvSpPr>
-        <p:spPr>
-          <a:xfrm>
-            <a:off x="9448495" y="2875787"/>
-            <a:ext cx="2194560" cy="347472"/>
-          </a:xfrm>
-          <a:prstGeom prst="rect">
-            <a:avLst/>
-          </a:prstGeom>
-          <a:noFill/>
-        </p:spPr>
-        <p:txBody>
-          <a:bodyPr wrap="square" anchor="ctr"/>
-          <a:lstStyle/>
-          <a:p>
-            <a:pPr algn="l">
-              <a:lnSpc>
-                <a:spcPct val="110000"/>
-              </a:lnSpc>
-            </a:pPr>
-            <a:r>
-              <a:rPr sz="1300" b="1">
-                <a:solidFill>
-                  <a:srgbClr val="FFFFFF"/>
-                </a:solidFill>
-                <a:latin typeface="맑은 고딕"/>
-                <a:ea typeface="맑은 고딕"/>
-                <a:cs typeface="맑은 고딕"/>
-              </a:rPr>
-              <a:t>받는 도구</a:t>
-            </a:r>
-          </a:p>
-        </p:txBody>
-      </p:sp>
-      <p:sp>
-        <p:nvSpPr>
-          <p:cNvPr id="10" name="Rounded Rectangle 9"/>
+              <a:spcAft>
+                <a:spcPts val="300"/>
+              </a:spcAft>
+            </a:pPr>
+            <a:r>
+              <a:rPr sz="1400" b="0">
+                <a:solidFill>
+                  <a:srgbClr val="1F2A3A"/>
+                </a:solidFill>
+                <a:latin typeface="맑은 고딕"/>
+                <a:ea typeface="맑은 고딕"/>
+                <a:cs typeface="맑은 고딕"/>
+              </a:rPr>
+              <a:t>맡은 일에 필요한 권한만 주고 그 밖의 권한은 주지 않는다는 원칙이다.</a:t>
+            </a:r>
+          </a:p>
+          <a:p>
+            <a:pPr algn="l">
+              <a:lnSpc>
+                <a:spcPct val="110000"/>
+              </a:lnSpc>
+              <a:spcAft>
+                <a:spcPts val="300"/>
+              </a:spcAft>
+            </a:pPr>
+            <a:r>
+              <a:rPr sz="1400" b="0">
+                <a:solidFill>
+                  <a:srgbClr val="1F2A3A"/>
+                </a:solidFill>
+                <a:latin typeface="맑은 고딕"/>
+                <a:ea typeface="맑은 고딕"/>
+                <a:cs typeface="맑은 고딕"/>
+              </a:rPr>
+              <a:t>읽기 도구라도 그 일에 쓰이지 않으면 연결하지 않는다.</a:t>
+            </a:r>
+          </a:p>
+        </p:txBody>
+      </p:sp>
+      <p:sp>
+        <p:nvSpPr>
+          <p:cNvPr id="9" name="Rectangle 8"/>
           <p:cNvSpPr/>
           <p:nvPr/>
         </p:nvSpPr>
         <p:spPr>
           <a:xfrm>
-            <a:off x="548640" y="3310127"/>
-            <a:ext cx="11094415" cy="850392"/>
-          </a:xfrm>
-          <a:prstGeom prst="roundRect">
-            <a:avLst>
-              <a:gd name="adj" fmla="val 8000"/>
-            </a:avLst>
+            <a:off x="548640" y="3296412"/>
+            <a:ext cx="11094415" cy="13716"/>
+          </a:xfrm>
+          <a:prstGeom prst="rect">
+            <a:avLst/>
           </a:prstGeom>
           <a:solidFill>
-            <a:srgbClr val="F3F6F9"/>
+            <a:srgbClr val="D3D9E1"/>
           </a:solidFill>
           <a:ln>
             <a:noFill/>
@@ -44802,14 +44809,77 @@
       </p:sp>
       <p:sp>
         <p:nvSpPr>
+          <p:cNvPr id="10" name="TextBox 9"/>
+          <p:cNvSpPr txBox="1"/>
+          <p:nvPr/>
+        </p:nvSpPr>
+        <p:spPr>
+          <a:xfrm>
+            <a:off x="640080" y="3305556"/>
+            <a:ext cx="3291839" cy="1371600"/>
+          </a:xfrm>
+          <a:prstGeom prst="rect">
+            <a:avLst/>
+          </a:prstGeom>
+          <a:noFill/>
+        </p:spPr>
+        <p:txBody>
+          <a:bodyPr wrap="square" anchor="ctr"/>
+          <a:lstStyle/>
+          <a:p>
+            <a:pPr algn="l">
+              <a:lnSpc>
+                <a:spcPct val="110000"/>
+              </a:lnSpc>
+              <a:spcAft>
+                <a:spcPts val="200"/>
+              </a:spcAft>
+            </a:pPr>
+            <a:r>
+              <a:rPr sz="1800" b="1">
+                <a:solidFill>
+                  <a:srgbClr val="13294B"/>
+                </a:solidFill>
+                <a:latin typeface="맑은 고딕"/>
+                <a:ea typeface="맑은 고딕"/>
+                <a:cs typeface="맑은 고딕"/>
+              </a:rPr>
+              <a:t>정기 정비 계획 에이전트</a:t>
+            </a:r>
+          </a:p>
+          <a:p>
+            <a:pPr algn="l">
+              <a:lnSpc>
+                <a:spcPct val="110000"/>
+              </a:lnSpc>
+              <a:spcAft>
+                <a:spcPts val="200"/>
+              </a:spcAft>
+            </a:pPr>
+            <a:r>
+              <a:rPr sz="1150" b="0">
+                <a:solidFill>
+                  <a:srgbClr val="556175"/>
+                </a:solidFill>
+                <a:latin typeface="맑은 고딕"/>
+                <a:ea typeface="맑은 고딕"/>
+                <a:cs typeface="맑은 고딕"/>
+              </a:rPr>
+              <a:t>정비용 서버</a:t>
+            </a:r>
+          </a:p>
+        </p:txBody>
+      </p:sp>
+      <p:sp>
+        <p:nvSpPr>
           <p:cNvPr id="11" name="TextBox 10"/>
           <p:cNvSpPr txBox="1"/>
           <p:nvPr/>
         </p:nvSpPr>
         <p:spPr>
           <a:xfrm>
-            <a:off x="685800" y="3278123"/>
-            <a:ext cx="2514600" cy="914400"/>
+            <a:off x="4023359" y="3305556"/>
+            <a:ext cx="7528255" cy="1371600"/>
           </a:xfrm>
           <a:prstGeom prst="rect">
             <a:avLst/>
@@ -44824,45 +44894,9 @@
               <a:lnSpc>
                 <a:spcPct val="110000"/>
               </a:lnSpc>
-            </a:pPr>
-            <a:r>
-              <a:rPr sz="1600" b="1">
-                <a:solidFill>
-                  <a:srgbClr val="13294B"/>
-                </a:solidFill>
-                <a:latin typeface="맑은 고딕"/>
-                <a:ea typeface="맑은 고딕"/>
-                <a:cs typeface="맑은 고딕"/>
-              </a:rPr>
-              <a:t>정기 정비 계획 에이전트</a:t>
-            </a:r>
-          </a:p>
-        </p:txBody>
-      </p:sp>
-      <p:sp>
-        <p:nvSpPr>
-          <p:cNvPr id="12" name="TextBox 11"/>
-          <p:cNvSpPr txBox="1"/>
-          <p:nvPr/>
-        </p:nvSpPr>
-        <p:spPr>
-          <a:xfrm>
-            <a:off x="3200400" y="3278123"/>
-            <a:ext cx="6156655" cy="914400"/>
-          </a:xfrm>
-          <a:prstGeom prst="rect">
-            <a:avLst/>
-          </a:prstGeom>
-          <a:noFill/>
-        </p:spPr>
-        <p:txBody>
-          <a:bodyPr wrap="square" anchor="ctr"/>
-          <a:lstStyle/>
-          <a:p>
-            <a:pPr algn="l">
-              <a:lnSpc>
-                <a:spcPct val="110000"/>
-              </a:lnSpc>
+              <a:spcAft>
+                <a:spcPts val="300"/>
+              </a:spcAft>
             </a:pPr>
             <a:r>
               <a:rPr sz="1400" b="0">
@@ -44873,86 +44907,48 @@
                 <a:ea typeface="맑은 고딕"/>
                 <a:cs typeface="맑은 고딕"/>
               </a:rPr>
-              <a:t>enterprise-maint</a:t>
-            </a:r>
-          </a:p>
-        </p:txBody>
-      </p:sp>
-      <p:sp>
-        <p:nvSpPr>
-          <p:cNvPr id="13" name="TextBox 12"/>
-          <p:cNvSpPr txBox="1"/>
-          <p:nvPr/>
-        </p:nvSpPr>
-        <p:spPr>
-          <a:xfrm>
-            <a:off x="9448495" y="3278123"/>
-            <a:ext cx="2103120" cy="914400"/>
-          </a:xfrm>
-          <a:prstGeom prst="rect">
-            <a:avLst/>
-          </a:prstGeom>
-          <a:noFill/>
-        </p:spPr>
-        <p:txBody>
-          <a:bodyPr wrap="square" anchor="ctr"/>
-          <a:lstStyle/>
-          <a:p>
-            <a:pPr algn="l">
-              <a:lnSpc>
-                <a:spcPct val="110000"/>
-              </a:lnSpc>
-            </a:pPr>
-            <a:r>
-              <a:rPr sz="1250" b="1">
-                <a:solidFill>
-                  <a:srgbClr val="556175"/>
-                </a:solidFill>
-                <a:latin typeface="맑은 고딕"/>
-                <a:ea typeface="맑은 고딕"/>
-                <a:cs typeface="맑은 고딕"/>
-              </a:rPr>
-              <a:t>정비 쪽 4개</a:t>
-            </a:r>
-          </a:p>
-          <a:p>
-            <a:pPr algn="l">
-              <a:lnSpc>
-                <a:spcPct val="110000"/>
-              </a:lnSpc>
-            </a:pPr>
-            <a:r>
-              <a:rPr sz="1250" b="1">
-                <a:solidFill>
-                  <a:srgbClr val="556175"/>
-                </a:solidFill>
-                <a:latin typeface="맑은 고딕"/>
-                <a:ea typeface="맑은 고딕"/>
-                <a:cs typeface="맑은 고딕"/>
-              </a:rPr>
-              <a:t>pm_status 등</a:t>
-            </a:r>
-          </a:p>
-        </p:txBody>
-      </p:sp>
-      <p:sp>
-        <p:nvSpPr>
-          <p:cNvPr id="14" name="Rounded Rectangle 13"/>
+              <a:t>업무 DB 서버 가운데 enterprise-maint만 연결한다.</a:t>
+            </a:r>
+          </a:p>
+          <a:p>
+            <a:pPr algn="l">
+              <a:lnSpc>
+                <a:spcPct val="110000"/>
+              </a:lnSpc>
+              <a:spcAft>
+                <a:spcPts val="300"/>
+              </a:spcAft>
+            </a:pPr>
+            <a:r>
+              <a:rPr sz="1400" b="0">
+                <a:solidFill>
+                  <a:srgbClr val="1F2A3A"/>
+                </a:solidFill>
+                <a:latin typeface="맑은 고딕"/>
+                <a:ea typeface="맑은 고딕"/>
+                <a:cs typeface="맑은 고딕"/>
+              </a:rPr>
+              <a:t>정비 쪽 도구 4개(pm_status 등)를 받는다.</a:t>
+            </a:r>
+          </a:p>
+        </p:txBody>
+      </p:sp>
+      <p:sp>
+        <p:nvSpPr>
+          <p:cNvPr id="12" name="Rectangle 11"/>
           <p:cNvSpPr/>
           <p:nvPr/>
         </p:nvSpPr>
         <p:spPr>
           <a:xfrm>
-            <a:off x="548640" y="4224527"/>
-            <a:ext cx="11094415" cy="850392"/>
-          </a:xfrm>
-          <a:prstGeom prst="roundRect">
-            <a:avLst>
-              <a:gd name="adj" fmla="val 8000"/>
-            </a:avLst>
+            <a:off x="548640" y="4668012"/>
+            <a:ext cx="11094415" cy="13716"/>
+          </a:xfrm>
+          <a:prstGeom prst="rect">
+            <a:avLst/>
           </a:prstGeom>
           <a:solidFill>
-            <a:srgbClr val="F3F6F9"/>
+            <a:srgbClr val="D3D9E1"/>
           </a:solidFill>
           <a:ln>
             <a:noFill/>
@@ -44968,14 +44964,14 @@
       </p:sp>
       <p:sp>
         <p:nvSpPr>
-          <p:cNvPr id="15" name="TextBox 14"/>
-          <p:cNvSpPr txBox="1"/>
-          <p:nvPr/>
-        </p:nvSpPr>
-        <p:spPr>
-          <a:xfrm>
-            <a:off x="685800" y="4192523"/>
-            <a:ext cx="2514600" cy="914400"/>
+          <p:cNvPr id="13" name="TextBox 12"/>
+          <p:cNvSpPr txBox="1"/>
+          <p:nvPr/>
+        </p:nvSpPr>
+        <p:spPr>
+          <a:xfrm>
+            <a:off x="640080" y="4677156"/>
+            <a:ext cx="3291839" cy="1371600"/>
           </a:xfrm>
           <a:prstGeom prst="rect">
             <a:avLst/>
@@ -44990,9 +44986,12 @@
               <a:lnSpc>
                 <a:spcPct val="110000"/>
               </a:lnSpc>
-            </a:pPr>
-            <a:r>
-              <a:rPr sz="1600" b="1">
+              <a:spcAft>
+                <a:spcPts val="200"/>
+              </a:spcAft>
+            </a:pPr>
+            <a:r>
+              <a:rPr sz="1800" b="1">
                 <a:solidFill>
                   <a:srgbClr val="13294B"/>
                 </a:solidFill>
@@ -45003,18 +45002,39 @@
               <a:t>예비품 구매 에이전트</a:t>
             </a:r>
           </a:p>
-        </p:txBody>
-      </p:sp>
-      <p:sp>
-        <p:nvSpPr>
-          <p:cNvPr id="16" name="TextBox 15"/>
-          <p:cNvSpPr txBox="1"/>
-          <p:nvPr/>
-        </p:nvSpPr>
-        <p:spPr>
-          <a:xfrm>
-            <a:off x="3200400" y="4192523"/>
-            <a:ext cx="6156655" cy="914400"/>
+          <a:p>
+            <a:pPr algn="l">
+              <a:lnSpc>
+                <a:spcPct val="110000"/>
+              </a:lnSpc>
+              <a:spcAft>
+                <a:spcPts val="200"/>
+              </a:spcAft>
+            </a:pPr>
+            <a:r>
+              <a:rPr sz="1150" b="0">
+                <a:solidFill>
+                  <a:srgbClr val="556175"/>
+                </a:solidFill>
+                <a:latin typeface="맑은 고딕"/>
+                <a:ea typeface="맑은 고딕"/>
+                <a:cs typeface="맑은 고딕"/>
+              </a:rPr>
+              <a:t>구매용 서버</a:t>
+            </a:r>
+          </a:p>
+        </p:txBody>
+      </p:sp>
+      <p:sp>
+        <p:nvSpPr>
+          <p:cNvPr id="14" name="TextBox 13"/>
+          <p:cNvSpPr txBox="1"/>
+          <p:nvPr/>
+        </p:nvSpPr>
+        <p:spPr>
+          <a:xfrm>
+            <a:off x="4023359" y="4677156"/>
+            <a:ext cx="7528255" cy="1371600"/>
           </a:xfrm>
           <a:prstGeom prst="rect">
             <a:avLst/>
@@ -45029,6 +45049,9 @@
               <a:lnSpc>
                 <a:spcPct val="110000"/>
               </a:lnSpc>
+              <a:spcAft>
+                <a:spcPts val="300"/>
+              </a:spcAft>
             </a:pPr>
             <a:r>
               <a:rPr sz="1400" b="0">
@@ -45039,64 +45062,28 @@
                 <a:ea typeface="맑은 고딕"/>
                 <a:cs typeface="맑은 고딕"/>
               </a:rPr>
-              <a:t>enterprise-purchase</a:t>
-            </a:r>
-          </a:p>
-        </p:txBody>
-      </p:sp>
-      <p:sp>
-        <p:nvSpPr>
-          <p:cNvPr id="17" name="TextBox 16"/>
-          <p:cNvSpPr txBox="1"/>
-          <p:nvPr/>
-        </p:nvSpPr>
-        <p:spPr>
-          <a:xfrm>
-            <a:off x="9448495" y="4192523"/>
-            <a:ext cx="2103120" cy="914400"/>
-          </a:xfrm>
-          <a:prstGeom prst="rect">
-            <a:avLst/>
-          </a:prstGeom>
-          <a:noFill/>
-        </p:spPr>
-        <p:txBody>
-          <a:bodyPr wrap="square" anchor="ctr"/>
-          <a:lstStyle/>
-          <a:p>
-            <a:pPr algn="l">
-              <a:lnSpc>
-                <a:spcPct val="110000"/>
-              </a:lnSpc>
-            </a:pPr>
-            <a:r>
-              <a:rPr sz="1250" b="1">
-                <a:solidFill>
-                  <a:srgbClr val="556175"/>
-                </a:solidFill>
-                <a:latin typeface="맑은 고딕"/>
-                <a:ea typeface="맑은 고딕"/>
-                <a:cs typeface="맑은 고딕"/>
-              </a:rPr>
-              <a:t>구매 쪽 3개</a:t>
-            </a:r>
-          </a:p>
-          <a:p>
-            <a:pPr algn="l">
-              <a:lnSpc>
-                <a:spcPct val="110000"/>
-              </a:lnSpc>
-            </a:pPr>
-            <a:r>
-              <a:rPr sz="1250" b="1">
-                <a:solidFill>
-                  <a:srgbClr val="556175"/>
-                </a:solidFill>
-                <a:latin typeface="맑은 고딕"/>
-                <a:ea typeface="맑은 고딕"/>
-                <a:cs typeface="맑은 고딕"/>
-              </a:rPr>
-              <a:t>part_quotes 등</a:t>
+              <a:t>enterprise-purchase만 연결한다.</a:t>
+            </a:r>
+          </a:p>
+          <a:p>
+            <a:pPr algn="l">
+              <a:lnSpc>
+                <a:spcPct val="110000"/>
+              </a:lnSpc>
+              <a:spcAft>
+                <a:spcPts val="300"/>
+              </a:spcAft>
+            </a:pPr>
+            <a:r>
+              <a:rPr sz="1400" b="0">
+                <a:solidFill>
+                  <a:srgbClr val="1F2A3A"/>
+                </a:solidFill>
+                <a:latin typeface="맑은 고딕"/>
+                <a:ea typeface="맑은 고딕"/>
+                <a:cs typeface="맑은 고딕"/>
+              </a:rPr>
+              <a:t>구매 쪽 도구 3개(part_quotes 등)를 받는다.</a:t>
             </a:r>
           </a:p>
         </p:txBody>
@@ -46146,7 +46133,7 @@
       </p:sp>
       <p:pic>
         <p:nvPicPr>
-          <p:cNvPr id="6" name="삽화:비밀값.svg" descr="illust_6178772601979352831_1791735675.png"/>
+          <p:cNvPr id="6" name="삽화:비밀값.svg" descr="illust_8994446393878961204_1791735675.png"/>
           <p:cNvPicPr>
             <a:picLocks noChangeAspect="1"/>
           </p:cNvPicPr>
@@ -47388,7 +47375,7 @@
                 <a:ea typeface="맑은 고딕"/>
                 <a:cs typeface="맑은 고딕"/>
               </a:rPr>
-              <a:t>조치 후보를 비교한 응답이 128,466자여서 본문이 전달되지 않았고, 에이전트는 읽지 못한 범위를 보고에 밝혔다.</a:t>
+              <a:t>조치 후보를 비교한 응답은 두 실행 모두 12만 자를 넘어 전달되지 않았고, 에이전트는 받지 못한 범위를 밝혔다.</a:t>
             </a:r>
           </a:p>
         </p:txBody>
@@ -47624,7 +47611,7 @@
                 <a:ea typeface="맑은 고딕"/>
                 <a:cs typeface="맑은 고딕"/>
               </a:rPr>
-              <a:t>807 ms</a:t>
+              <a:t>두 실행에서 같은 도구</a:t>
             </a:r>
           </a:p>
         </p:txBody>
@@ -47802,7 +47789,7 @@
                 <a:ea typeface="맑은 고딕"/>
                 <a:cs typeface="맑은 고딕"/>
               </a:rPr>
-              <a:t>128,466자</a:t>
+              <a:t>128,466자와 128,468자</a:t>
             </a:r>
           </a:p>
           <a:p>
@@ -47978,7 +47965,7 @@
                 <a:ea typeface="맑은 고딕"/>
                 <a:cs typeface="맑은 고딕"/>
               </a:rPr>
-              <a:t>다시 조회</a:t>
+              <a:t>첫째 경보의 실행</a:t>
             </a:r>
           </a:p>
           <a:p>
@@ -48175,7 +48162,7 @@
                 <a:ea typeface="맑은 고딕"/>
                 <a:cs typeface="맑은 고딕"/>
               </a:rPr>
-              <a:t>범위의 표시</a:t>
+              <a:t>둘째 경보의 실행</a:t>
             </a:r>
           </a:p>
           <a:p>
@@ -48321,7 +48308,7 @@
                 <a:ea typeface="맑은 고딕"/>
                 <a:cs typeface="맑은 고딕"/>
               </a:rPr>
-              <a:t>조회에 실패한 것을 0이나 빈 값으로 바꾸어 내면, 값이 없다는 틀린 사실이 판단에 들어간다.</a:t>
+              <a:t>값 없음과 실패의 구분에 더해, 시간을 넘긴 응답과 잘린 응답도 결과에 적는 법이 따로 정해져 있다.</a:t>
             </a:r>
           </a:p>
         </p:txBody>
@@ -48707,6 +48694,190 @@
             </a:avLst>
           </a:prstGeom>
           <a:solidFill>
+            <a:srgbClr val="F3F6F9"/>
+          </a:solidFill>
+          <a:ln>
+            <a:noFill/>
+          </a:ln>
+        </p:spPr>
+        <p:txBody>
+          <a:bodyPr rtlCol="0" anchor="ctr"/>
+          <a:lstStyle/>
+          <a:p>
+            <a:pPr algn="ctr"/>
+          </a:p>
+        </p:txBody>
+      </p:sp>
+      <p:sp>
+        <p:nvSpPr>
+          <p:cNvPr id="15" name="TextBox 14"/>
+          <p:cNvSpPr txBox="1"/>
+          <p:nvPr/>
+        </p:nvSpPr>
+        <p:spPr>
+          <a:xfrm>
+            <a:off x="685800" y="3278123"/>
+            <a:ext cx="2514600" cy="914400"/>
+          </a:xfrm>
+          <a:prstGeom prst="rect">
+            <a:avLst/>
+          </a:prstGeom>
+          <a:noFill/>
+        </p:spPr>
+        <p:txBody>
+          <a:bodyPr wrap="square" anchor="ctr"/>
+          <a:lstStyle/>
+          <a:p>
+            <a:pPr algn="l">
+              <a:lnSpc>
+                <a:spcPct val="110000"/>
+              </a:lnSpc>
+            </a:pPr>
+            <a:r>
+              <a:rPr sz="1600" b="1">
+                <a:solidFill>
+                  <a:srgbClr val="13294B"/>
+                </a:solidFill>
+                <a:latin typeface="맑은 고딕"/>
+                <a:ea typeface="맑은 고딕"/>
+                <a:cs typeface="맑은 고딕"/>
+              </a:rPr>
+              <a:t>호출이 실패했다</a:t>
+            </a:r>
+          </a:p>
+        </p:txBody>
+      </p:sp>
+      <p:sp>
+        <p:nvSpPr>
+          <p:cNvPr id="16" name="TextBox 15"/>
+          <p:cNvSpPr txBox="1"/>
+          <p:nvPr/>
+        </p:nvSpPr>
+        <p:spPr>
+          <a:xfrm>
+            <a:off x="3200400" y="3278123"/>
+            <a:ext cx="6156655" cy="914400"/>
+          </a:xfrm>
+          <a:prstGeom prst="rect">
+            <a:avLst/>
+          </a:prstGeom>
+          <a:noFill/>
+        </p:spPr>
+        <p:txBody>
+          <a:bodyPr wrap="square" anchor="ctr"/>
+          <a:lstStyle/>
+          <a:p>
+            <a:pPr algn="l">
+              <a:lnSpc>
+                <a:spcPct val="110000"/>
+              </a:lnSpc>
+            </a:pPr>
+            <a:r>
+              <a:rPr sz="1400" b="0">
+                <a:solidFill>
+                  <a:srgbClr val="1F2A3A"/>
+                </a:solidFill>
+                <a:latin typeface="맑은 고딕"/>
+                <a:ea typeface="맑은 고딕"/>
+                <a:cs typeface="맑은 고딕"/>
+              </a:rPr>
+              <a:t>result가 error이고</a:t>
+            </a:r>
+          </a:p>
+          <a:p>
+            <a:pPr algn="l">
+              <a:lnSpc>
+                <a:spcPct val="110000"/>
+              </a:lnSpc>
+            </a:pPr>
+            <a:r>
+              <a:rPr sz="1400" b="0">
+                <a:solidFill>
+                  <a:srgbClr val="1F2A3A"/>
+                </a:solidFill>
+                <a:latin typeface="맑은 고딕"/>
+                <a:ea typeface="맑은 고딕"/>
+                <a:cs typeface="맑은 고딕"/>
+              </a:rPr>
+              <a:t>사유가 message에 담겨 온다</a:t>
+            </a:r>
+          </a:p>
+        </p:txBody>
+      </p:sp>
+      <p:sp>
+        <p:nvSpPr>
+          <p:cNvPr id="17" name="TextBox 16"/>
+          <p:cNvSpPr txBox="1"/>
+          <p:nvPr/>
+        </p:nvSpPr>
+        <p:spPr>
+          <a:xfrm>
+            <a:off x="9448495" y="3278123"/>
+            <a:ext cx="2103120" cy="914400"/>
+          </a:xfrm>
+          <a:prstGeom prst="rect">
+            <a:avLst/>
+          </a:prstGeom>
+          <a:noFill/>
+        </p:spPr>
+        <p:txBody>
+          <a:bodyPr wrap="square" anchor="ctr"/>
+          <a:lstStyle/>
+          <a:p>
+            <a:pPr algn="l">
+              <a:lnSpc>
+                <a:spcPct val="110000"/>
+              </a:lnSpc>
+            </a:pPr>
+            <a:r>
+              <a:rPr sz="1250" b="1">
+                <a:solidFill>
+                  <a:srgbClr val="556175"/>
+                </a:solidFill>
+                <a:latin typeface="맑은 고딕"/>
+                <a:ea typeface="맑은 고딕"/>
+                <a:cs typeface="맑은 고딕"/>
+              </a:rPr>
+              <a:t>실패로 적는다</a:t>
+            </a:r>
+          </a:p>
+          <a:p>
+            <a:pPr algn="l">
+              <a:lnSpc>
+                <a:spcPct val="110000"/>
+              </a:lnSpc>
+            </a:pPr>
+            <a:r>
+              <a:rPr sz="1250" b="1">
+                <a:solidFill>
+                  <a:srgbClr val="556175"/>
+                </a:solidFill>
+                <a:latin typeface="맑은 고딕"/>
+                <a:ea typeface="맑은 고딕"/>
+                <a:cs typeface="맑은 고딕"/>
+              </a:rPr>
+              <a:t>0이나 빈 값으로 바꾸지 않는다</a:t>
+            </a:r>
+          </a:p>
+        </p:txBody>
+      </p:sp>
+      <p:sp>
+        <p:nvSpPr>
+          <p:cNvPr id="18" name="Rounded Rectangle 17"/>
+          <p:cNvSpPr/>
+          <p:nvPr/>
+        </p:nvSpPr>
+        <p:spPr>
+          <a:xfrm>
+            <a:off x="548640" y="4224527"/>
+            <a:ext cx="11094415" cy="850392"/>
+          </a:xfrm>
+          <a:prstGeom prst="roundRect">
+            <a:avLst>
+              <a:gd name="adj" fmla="val 8000"/>
+            </a:avLst>
+          </a:prstGeom>
+          <a:solidFill>
             <a:srgbClr val="E7F3FD"/>
           </a:solidFill>
           <a:ln>
@@ -48723,190 +48894,6 @@
       </p:sp>
       <p:sp>
         <p:nvSpPr>
-          <p:cNvPr id="15" name="TextBox 14"/>
-          <p:cNvSpPr txBox="1"/>
-          <p:nvPr/>
-        </p:nvSpPr>
-        <p:spPr>
-          <a:xfrm>
-            <a:off x="685800" y="3278123"/>
-            <a:ext cx="2514600" cy="914400"/>
-          </a:xfrm>
-          <a:prstGeom prst="rect">
-            <a:avLst/>
-          </a:prstGeom>
-          <a:noFill/>
-        </p:spPr>
-        <p:txBody>
-          <a:bodyPr wrap="square" anchor="ctr"/>
-          <a:lstStyle/>
-          <a:p>
-            <a:pPr algn="l">
-              <a:lnSpc>
-                <a:spcPct val="110000"/>
-              </a:lnSpc>
-            </a:pPr>
-            <a:r>
-              <a:rPr sz="1600" b="1">
-                <a:solidFill>
-                  <a:srgbClr val="13294B"/>
-                </a:solidFill>
-                <a:latin typeface="맑은 고딕"/>
-                <a:ea typeface="맑은 고딕"/>
-                <a:cs typeface="맑은 고딕"/>
-              </a:rPr>
-              <a:t>호출이 실패했다</a:t>
-            </a:r>
-          </a:p>
-        </p:txBody>
-      </p:sp>
-      <p:sp>
-        <p:nvSpPr>
-          <p:cNvPr id="16" name="TextBox 15"/>
-          <p:cNvSpPr txBox="1"/>
-          <p:nvPr/>
-        </p:nvSpPr>
-        <p:spPr>
-          <a:xfrm>
-            <a:off x="3200400" y="3278123"/>
-            <a:ext cx="6156655" cy="914400"/>
-          </a:xfrm>
-          <a:prstGeom prst="rect">
-            <a:avLst/>
-          </a:prstGeom>
-          <a:noFill/>
-        </p:spPr>
-        <p:txBody>
-          <a:bodyPr wrap="square" anchor="ctr"/>
-          <a:lstStyle/>
-          <a:p>
-            <a:pPr algn="l">
-              <a:lnSpc>
-                <a:spcPct val="110000"/>
-              </a:lnSpc>
-            </a:pPr>
-            <a:r>
-              <a:rPr sz="1400" b="0">
-                <a:solidFill>
-                  <a:srgbClr val="1F2A3A"/>
-                </a:solidFill>
-                <a:latin typeface="맑은 고딕"/>
-                <a:ea typeface="맑은 고딕"/>
-                <a:cs typeface="맑은 고딕"/>
-              </a:rPr>
-              <a:t>result가 error이고</a:t>
-            </a:r>
-          </a:p>
-          <a:p>
-            <a:pPr algn="l">
-              <a:lnSpc>
-                <a:spcPct val="110000"/>
-              </a:lnSpc>
-            </a:pPr>
-            <a:r>
-              <a:rPr sz="1400" b="0">
-                <a:solidFill>
-                  <a:srgbClr val="1F2A3A"/>
-                </a:solidFill>
-                <a:latin typeface="맑은 고딕"/>
-                <a:ea typeface="맑은 고딕"/>
-                <a:cs typeface="맑은 고딕"/>
-              </a:rPr>
-              <a:t>사유가 message에 담겨 온다</a:t>
-            </a:r>
-          </a:p>
-        </p:txBody>
-      </p:sp>
-      <p:sp>
-        <p:nvSpPr>
-          <p:cNvPr id="17" name="TextBox 16"/>
-          <p:cNvSpPr txBox="1"/>
-          <p:nvPr/>
-        </p:nvSpPr>
-        <p:spPr>
-          <a:xfrm>
-            <a:off x="9448495" y="3278123"/>
-            <a:ext cx="2103120" cy="914400"/>
-          </a:xfrm>
-          <a:prstGeom prst="rect">
-            <a:avLst/>
-          </a:prstGeom>
-          <a:noFill/>
-        </p:spPr>
-        <p:txBody>
-          <a:bodyPr wrap="square" anchor="ctr"/>
-          <a:lstStyle/>
-          <a:p>
-            <a:pPr algn="l">
-              <a:lnSpc>
-                <a:spcPct val="110000"/>
-              </a:lnSpc>
-            </a:pPr>
-            <a:r>
-              <a:rPr sz="1250" b="1">
-                <a:solidFill>
-                  <a:srgbClr val="1A6FC4"/>
-                </a:solidFill>
-                <a:latin typeface="맑은 고딕"/>
-                <a:ea typeface="맑은 고딕"/>
-                <a:cs typeface="맑은 고딕"/>
-              </a:rPr>
-              <a:t>실패로 적는다</a:t>
-            </a:r>
-          </a:p>
-          <a:p>
-            <a:pPr algn="l">
-              <a:lnSpc>
-                <a:spcPct val="110000"/>
-              </a:lnSpc>
-            </a:pPr>
-            <a:r>
-              <a:rPr sz="1250" b="1">
-                <a:solidFill>
-                  <a:srgbClr val="1A6FC4"/>
-                </a:solidFill>
-                <a:latin typeface="맑은 고딕"/>
-                <a:ea typeface="맑은 고딕"/>
-                <a:cs typeface="맑은 고딕"/>
-              </a:rPr>
-              <a:t>0이나 빈 값으로 바꾸지 않는다</a:t>
-            </a:r>
-          </a:p>
-        </p:txBody>
-      </p:sp>
-      <p:sp>
-        <p:nvSpPr>
-          <p:cNvPr id="18" name="Rounded Rectangle 17"/>
-          <p:cNvSpPr/>
-          <p:nvPr/>
-        </p:nvSpPr>
-        <p:spPr>
-          <a:xfrm>
-            <a:off x="548640" y="4224527"/>
-            <a:ext cx="11094415" cy="850392"/>
-          </a:xfrm>
-          <a:prstGeom prst="roundRect">
-            <a:avLst>
-              <a:gd name="adj" fmla="val 8000"/>
-            </a:avLst>
-          </a:prstGeom>
-          <a:solidFill>
-            <a:srgbClr val="F3F6F9"/>
-          </a:solidFill>
-          <a:ln>
-            <a:noFill/>
-          </a:ln>
-        </p:spPr>
-        <p:txBody>
-          <a:bodyPr rtlCol="0" anchor="ctr"/>
-          <a:lstStyle/>
-          <a:p>
-            <a:pPr algn="ctr"/>
-          </a:p>
-        </p:txBody>
-      </p:sp>
-      <p:sp>
-        <p:nvSpPr>
           <p:cNvPr id="19" name="TextBox 18"/>
           <p:cNvSpPr txBox="1"/>
           <p:nvPr/>
@@ -49029,7 +49016,7 @@
             <a:r>
               <a:rPr sz="1250" b="1">
                 <a:solidFill>
-                  <a:srgbClr val="556175"/>
+                  <a:srgbClr val="1A6FC4"/>
                 </a:solidFill>
                 <a:latin typeface="맑은 고딕"/>
                 <a:ea typeface="맑은 고딕"/>
@@ -49305,7 +49292,7 @@
                 <a:ea typeface="맑은 고딕"/>
                 <a:cs typeface="맑은 고딕"/>
               </a:rPr>
-              <a:t>도구 호출마다 시각과 입력과 받은 결과가 기록되어, 판단에 쓰인 값이 어느 호출에서 왔는지를 되짚을 수 있다.</a:t>
+              <a:t>외부 도구에서 받은 값을 판단에 쓰려면 어느 서버의 어느 도구가 준 값인지와 그 값의 원천이 함께 남아 있어야 한다.</a:t>
             </a:r>
           </a:p>
         </p:txBody>
@@ -49386,8 +49373,8 @@
         </p:nvSpPr>
         <p:spPr>
           <a:xfrm>
-            <a:off x="548640" y="2207768"/>
-            <a:ext cx="6766560" cy="3567175"/>
+            <a:off x="548640" y="1990852"/>
+            <a:ext cx="6766560" cy="4001008"/>
           </a:xfrm>
           <a:prstGeom prst="roundRect">
             <a:avLst>
@@ -49417,8 +49404,8 @@
         </p:nvSpPr>
         <p:spPr>
           <a:xfrm>
-            <a:off x="731520" y="2344928"/>
-            <a:ext cx="6400800" cy="3292856"/>
+            <a:off x="731520" y="2128012"/>
+            <a:ext cx="6400800" cy="3726688"/>
           </a:xfrm>
           <a:prstGeom prst="rect">
             <a:avLst/>
@@ -49695,8 +49682,8 @@
         </p:nvSpPr>
         <p:spPr>
           <a:xfrm>
-            <a:off x="7635240" y="2207768"/>
-            <a:ext cx="4007815" cy="891793"/>
+            <a:off x="7635240" y="1990852"/>
+            <a:ext cx="4007815" cy="1000252"/>
           </a:xfrm>
           <a:prstGeom prst="rect">
             <a:avLst/>
@@ -49758,8 +49745,8 @@
         </p:nvSpPr>
         <p:spPr>
           <a:xfrm>
-            <a:off x="7635240" y="3099561"/>
-            <a:ext cx="4007815" cy="891793"/>
+            <a:off x="7635240" y="2991104"/>
+            <a:ext cx="4007815" cy="1000252"/>
           </a:xfrm>
           <a:prstGeom prst="rect">
             <a:avLst/>
@@ -49808,7 +49795,7 @@
                 <a:ea typeface="맑은 고딕"/>
                 <a:cs typeface="맑은 고딕"/>
               </a:rPr>
-              <a:t>어느 서버의 어느 도구였는지가 남는다.</a:t>
+              <a:t>hyd-dmn의 diagnose. 값을 준 서버와 도구가 남는다.</a:t>
             </a:r>
           </a:p>
         </p:txBody>
@@ -49822,7 +49809,7 @@
         <p:spPr>
           <a:xfrm>
             <a:off x="7635240" y="3991356"/>
-            <a:ext cx="4007815" cy="891793"/>
+            <a:ext cx="4007815" cy="1000252"/>
           </a:xfrm>
           <a:prstGeom prst="rect">
             <a:avLst/>
@@ -49884,8 +49871,8 @@
         </p:nvSpPr>
         <p:spPr>
           <a:xfrm>
-            <a:off x="7635240" y="4883150"/>
-            <a:ext cx="4007815" cy="891793"/>
+            <a:off x="7635240" y="4991608"/>
+            <a:ext cx="4007815" cy="1000252"/>
           </a:xfrm>
           <a:prstGeom prst="rect">
             <a:avLst/>
@@ -49935,6 +49922,27 @@
                 <a:cs typeface="맑은 고딕"/>
               </a:rPr>
               <a:t>응답 안의 값마다 원천과 관측 시각이 붙는다.</a:t>
+            </a:r>
+          </a:p>
+          <a:p>
+            <a:pPr algn="l">
+              <a:lnSpc>
+                <a:spcPct val="110000"/>
+              </a:lnSpc>
+              <a:spcAft>
+                <a:spcPts val="400"/>
+              </a:spcAft>
+            </a:pPr>
+            <a:r>
+              <a:rPr sz="1400" b="0">
+                <a:solidFill>
+                  <a:srgbClr val="1F2A3A"/>
+                </a:solidFill>
+                <a:latin typeface="맑은 고딕"/>
+                <a:ea typeface="맑은 고딕"/>
+                <a:cs typeface="맑은 고딕"/>
+              </a:rPr>
+              <a:t>예: 납기까지 5.98시간의 원천은 MES이다.</a:t>
             </a:r>
           </a:p>
         </p:txBody>
@@ -50929,7 +50937,7 @@
                 <a:ea typeface="맑은 고딕"/>
                 <a:cs typeface="맑은 고딕"/>
               </a:rPr>
-              <a:t>03단원 정리: 연결할 때 확인하는 네 가지</a:t>
+              <a:t>단원 정리: 연결할 때 확인하는 네 가지</a:t>
             </a:r>
           </a:p>
         </p:txBody>
@@ -56665,7 +56673,7 @@
                 <a:ea typeface="맑은 고딕"/>
                 <a:cs typeface="맑은 고딕"/>
               </a:rPr>
-              <a:t>이 실습을 마치면 학습 노트에서 문항을 내고 출처를 붙여 답을 되짚어 주는 대화형 학습 코치가 만들어진다.</a:t>
+              <a:t>학습 노트에서 문항을 내고, 답을 받아 정답과 출처로 되짚은 뒤 다음 문항으로 넘어가는 대화를 구성한다.</a:t>
             </a:r>
           </a:p>
         </p:txBody>
@@ -59053,7 +59061,7 @@
       </p:sp>
       <p:pic>
         <p:nvPicPr>
-          <p:cNvPr id="6" name="삽화:고리_1.svg" descr="illust_1135745551840253754_1791735675.png"/>
+          <p:cNvPr id="6" name="삽화:고리_1.svg" descr="illust_8639756802687539534_1791735675.png"/>
           <p:cNvPicPr>
             <a:picLocks noChangeAspect="1"/>
           </p:cNvPicPr>
@@ -61182,7 +61190,7 @@
                 <a:ea typeface="맑은 고딕"/>
                 <a:cs typeface="맑은 고딕"/>
               </a:rPr>
-              <a:t>연결 검사를 통과한 서버의 도구가 read_rows(표시 true), update_row(false), export(표시 없음)이다.</a:t>
+              <a:t>새로 등록한 서버의 도구 목록이 read_rows(표시 true), update_row(false), export(표시 없음)이다.</a:t>
             </a:r>
           </a:p>
         </p:txBody>

--- a/docs/교재/통합반/06일차/통합반_06일차.pptx
+++ b/docs/교재/통합반/06일차/통합반_06일차.pptx
@@ -12422,7 +12422,7 @@
       </p:sp>
       <p:pic>
         <p:nvPicPr>
-          <p:cNvPr id="6" name="삽화:스킬문서.svg" descr="illust_8117605648421484525_1791735675.png"/>
+          <p:cNvPr id="6" name="삽화:스킬문서.svg" descr="illust_5653381011295455892_1791735675.png"/>
           <p:cNvPicPr>
             <a:picLocks noChangeAspect="1"/>
           </p:cNvPicPr>
@@ -14782,7 +14782,7 @@
       </p:sp>
       <p:pic>
         <p:nvPicPr>
-          <p:cNvPr id="6" name="삽화:절차호출.svg" descr="illust_8648747231977767948_1791735675.png"/>
+          <p:cNvPr id="6" name="삽화:절차호출.svg" descr="illust_8341744332287407393_1791735675.png"/>
           <p:cNvPicPr>
             <a:picLocks noChangeAspect="1"/>
           </p:cNvPicPr>
@@ -15419,7 +15419,7 @@
       </p:sp>
       <p:pic>
         <p:nvPicPr>
-          <p:cNvPr id="6" name="삽화:두절차.svg" descr="illust_5191087343944546913_1791735675.png"/>
+          <p:cNvPr id="6" name="삽화:두절차.svg" descr="illust_7067290181743062996_1791735675.png"/>
           <p:cNvPicPr>
             <a:picLocks noChangeAspect="1"/>
           </p:cNvPicPr>
@@ -19883,7 +19883,7 @@
       </p:sp>
       <p:pic>
         <p:nvPicPr>
-          <p:cNvPr id="6" name="삽화:재사용.svg" descr="illust_65810126516696607_1791735675.png"/>
+          <p:cNvPr id="6" name="삽화:재사용.svg" descr="illust_2248809309612463323_1791735675.png"/>
           <p:cNvPicPr>
             <a:picLocks noChangeAspect="1"/>
           </p:cNvPicPr>
@@ -24924,7 +24924,7 @@
       </p:sp>
       <p:pic>
         <p:nvPicPr>
-          <p:cNvPr id="6" name="삽화:연결의수.svg" descr="illust_7214765527535850682_1791735675.png"/>
+          <p:cNvPr id="6" name="삽화:연결의수.svg" descr="illust_2611235636251672293_1791735675.png"/>
           <p:cNvPicPr>
             <a:picLocks noChangeAspect="1"/>
           </p:cNvPicPr>
@@ -26730,7 +26730,7 @@
       </p:sp>
       <p:pic>
         <p:nvPicPr>
-          <p:cNvPr id="6" name="삽화:MCP구성.svg" descr="illust_6199619008749416442_1791735675.png"/>
+          <p:cNvPr id="6" name="삽화:MCP구성.svg" descr="illust_2705725959936516714_1791735675.png"/>
           <p:cNvPicPr>
             <a:picLocks noChangeAspect="1"/>
           </p:cNvPicPr>
@@ -29395,7 +29395,7 @@
       </p:sp>
       <p:pic>
         <p:nvPicPr>
-          <p:cNvPr id="6" name="삽화:목록호출.svg" descr="illust_3385069735426759718_1791735675.png"/>
+          <p:cNvPr id="6" name="삽화:목록호출.svg" descr="illust_764328876886205270_1791735675.png"/>
           <p:cNvPicPr>
             <a:picLocks noChangeAspect="1"/>
           </p:cNvPicPr>
@@ -34268,7 +34268,7 @@
       </p:sp>
       <p:pic>
         <p:nvPicPr>
-          <p:cNvPr id="6" name="삽화:연결방식.svg" descr="illust_7147436185637736293_1791735675.png"/>
+          <p:cNvPr id="6" name="삽화:연결방식.svg" descr="illust_8387890456279773555_1791735675.png"/>
           <p:cNvPicPr>
             <a:picLocks noChangeAspect="1"/>
           </p:cNvPicPr>
@@ -41757,7 +41757,7 @@
       </p:sp>
       <p:pic>
         <p:nvPicPr>
-          <p:cNvPr id="6" name="삽화:세겹.svg" descr="illust_1723677533139300529_1791735675.png"/>
+          <p:cNvPr id="6" name="삽화:세겹.svg" descr="illust_2907826546451679420_1791735675.png"/>
           <p:cNvPicPr>
             <a:picLocks noChangeAspect="1"/>
           </p:cNvPicPr>
@@ -43073,7 +43073,7 @@
       </p:sp>
       <p:pic>
         <p:nvPicPr>
-          <p:cNvPr id="6" name="삽화:고리_0.svg" descr="illust_3825033042115972106_1791735675.png"/>
+          <p:cNvPr id="6" name="삽화:고리_0.svg" descr="illust_1372946587703356183_1791735675.png"/>
           <p:cNvPicPr>
             <a:picLocks noChangeAspect="1"/>
           </p:cNvPicPr>
@@ -46133,7 +46133,7 @@
       </p:sp>
       <p:pic>
         <p:nvPicPr>
-          <p:cNvPr id="6" name="삽화:비밀값.svg" descr="illust_8994446393878961204_1791735675.png"/>
+          <p:cNvPr id="6" name="삽화:비밀값.svg" descr="illust_5769544222642512231_1791735675.png"/>
           <p:cNvPicPr>
             <a:picLocks noChangeAspect="1"/>
           </p:cNvPicPr>
@@ -58882,7 +58882,7 @@
                 <a:ea typeface="맑은 고딕"/>
                 <a:cs typeface="맑은 고딕"/>
               </a:rPr>
-              <a:t>배운 내용을 바탕으로 정답을 맞춰보세요.</a:t>
+              <a:t>배운 내용을 바탕으로 정답을 맞혀 보세요.</a:t>
             </a:r>
           </a:p>
         </p:txBody>
@@ -59061,7 +59061,7 @@
       </p:sp>
       <p:pic>
         <p:nvPicPr>
-          <p:cNvPr id="6" name="삽화:고리_1.svg" descr="illust_8639756802687539534_1791735675.png"/>
+          <p:cNvPr id="6" name="삽화:고리_1.svg" descr="illust_1389040576946361519_1791735675.png"/>
           <p:cNvPicPr>
             <a:picLocks noChangeAspect="1"/>
           </p:cNvPicPr>

--- a/docs/교재/통합반/06일차/통합반_06일차.pptx
+++ b/docs/교재/통합반/06일차/통합반_06일차.pptx
@@ -4073,7 +4073,7 @@
           <a:lstStyle/>
           <a:p>
             <a:r>
-              <a:t>둘째 실습은 VS Code의 Claude Code에서 진행합니다. 준비된 파일시스템, Git, 시간 서버를 각각 연결하고 접근 권한을 서버별로 정합니다. 서버마다 도구 목록과 호출 결과를 견준 뒤, 세 서버의 도구를 한 요청에서 이어 부릅니다. 포털과 로컬에서 연결 방식이 어떻게 다른지도 이 실습에서 확인합니다.</a:t>
+              <a:t>둘째 실습은 VS Code의 AI 코딩 도구에서 진행합니다. 준비된 파일시스템, Git, 시간 서버를 각각 연결하고 접근 권한을 서버별로 정합니다. 서버마다 도구 목록과 호출 결과를 견준 뒤, 세 서버의 도구를 한 요청에서 이어 부릅니다. HYD 포털과 내 PC의 AI 코딩 도구가 MCP 서버를 연결하는 방식이 어떻게 다른지도 이 실습에서 확인합니다.</a:t>
             </a:r>
           </a:p>
         </p:txBody>
@@ -12351,7 +12351,7 @@
       </p:sp>
       <p:pic>
         <p:nvPicPr>
-          <p:cNvPr id="6" name="삽화:스킬문서.svg" descr="illust_1928808625655684656_1791735675.png"/>
+          <p:cNvPr id="6" name="삽화:스킬문서.svg" descr="illust_7336461213703272051_1791735675.png"/>
           <p:cNvPicPr>
             <a:picLocks noChangeAspect="1"/>
           </p:cNvPicPr>
@@ -14711,7 +14711,7 @@
       </p:sp>
       <p:pic>
         <p:nvPicPr>
-          <p:cNvPr id="6" name="삽화:절차호출.svg" descr="illust_6399449110441494053_1791735675.png"/>
+          <p:cNvPr id="6" name="삽화:절차호출.svg" descr="illust_9162079500460247923_1791735675.png"/>
           <p:cNvPicPr>
             <a:picLocks noChangeAspect="1"/>
           </p:cNvPicPr>
@@ -15348,7 +15348,7 @@
       </p:sp>
       <p:pic>
         <p:nvPicPr>
-          <p:cNvPr id="6" name="삽화:두절차.svg" descr="illust_2572847512181366126_1791735675.png"/>
+          <p:cNvPr id="6" name="삽화:두절차.svg" descr="illust_8713626558548929116_1791735675.png"/>
           <p:cNvPicPr>
             <a:picLocks noChangeAspect="1"/>
           </p:cNvPicPr>
@@ -19812,7 +19812,7 @@
       </p:sp>
       <p:pic>
         <p:nvPicPr>
-          <p:cNvPr id="6" name="삽화:재사용.svg" descr="illust_7393993645053389182_1791735675.png"/>
+          <p:cNvPr id="6" name="삽화:재사용.svg" descr="illust_5293569651058294974_1791735675.png"/>
           <p:cNvPicPr>
             <a:picLocks noChangeAspect="1"/>
           </p:cNvPicPr>
@@ -24853,7 +24853,7 @@
       </p:sp>
       <p:pic>
         <p:nvPicPr>
-          <p:cNvPr id="6" name="삽화:연결의수.svg" descr="illust_3000103009471210295_1791735675.png"/>
+          <p:cNvPr id="6" name="삽화:연결의수.svg" descr="illust_182260323257173321_1791735675.png"/>
           <p:cNvPicPr>
             <a:picLocks noChangeAspect="1"/>
           </p:cNvPicPr>
@@ -26659,7 +26659,7 @@
       </p:sp>
       <p:pic>
         <p:nvPicPr>
-          <p:cNvPr id="6" name="삽화:MCP구성.svg" descr="illust_8192867151318812436_1791735675.png"/>
+          <p:cNvPr id="6" name="삽화:MCP구성.svg" descr="illust_6579396851287202085_1791735675.png"/>
           <p:cNvPicPr>
             <a:picLocks noChangeAspect="1"/>
           </p:cNvPicPr>
@@ -29324,7 +29324,7 @@
       </p:sp>
       <p:pic>
         <p:nvPicPr>
-          <p:cNvPr id="6" name="삽화:목록호출.svg" descr="illust_7589848221743962015_1791735675.png"/>
+          <p:cNvPr id="6" name="삽화:목록호출.svg" descr="illust_2252882636255302502_1791735675.png"/>
           <p:cNvPicPr>
             <a:picLocks noChangeAspect="1"/>
           </p:cNvPicPr>
@@ -34197,7 +34197,7 @@
       </p:sp>
       <p:pic>
         <p:nvPicPr>
-          <p:cNvPr id="6" name="삽화:연결방식.svg" descr="illust_8149859448166553209_1791735675.png"/>
+          <p:cNvPr id="6" name="삽화:연결방식.svg" descr="illust_4896914081791750179_1791735675.png"/>
           <p:cNvPicPr>
             <a:picLocks noChangeAspect="1"/>
           </p:cNvPicPr>
@@ -41686,7 +41686,7 @@
       </p:sp>
       <p:pic>
         <p:nvPicPr>
-          <p:cNvPr id="6" name="삽화:세겹.svg" descr="illust_4409057647278469927_1791735675.png"/>
+          <p:cNvPr id="6" name="삽화:세겹.svg" descr="illust_8863433764530320616_1791735675.png"/>
           <p:cNvPicPr>
             <a:picLocks noChangeAspect="1"/>
           </p:cNvPicPr>
@@ -43002,7 +43002,7 @@
       </p:sp>
       <p:pic>
         <p:nvPicPr>
-          <p:cNvPr id="6" name="삽화:고리_0.svg" descr="illust_2120804086544187746_1791735675.png"/>
+          <p:cNvPr id="6" name="삽화:고리_0.svg" descr="illust_7424113737850357243_1791735675.png"/>
           <p:cNvPicPr>
             <a:picLocks noChangeAspect="1"/>
           </p:cNvPicPr>
@@ -46062,7 +46062,7 @@
       </p:sp>
       <p:pic>
         <p:nvPicPr>
-          <p:cNvPr id="6" name="삽화:비밀값.svg" descr="illust_2687922963160145447_1791735675.png"/>
+          <p:cNvPr id="6" name="삽화:비밀값.svg" descr="illust_772760622223487894_1791735675.png"/>
           <p:cNvPicPr>
             <a:picLocks noChangeAspect="1"/>
           </p:cNvPicPr>
@@ -53426,7 +53426,7 @@
                 <a:ea typeface="맑은 고딕"/>
                 <a:cs typeface="맑은 고딕"/>
               </a:rPr>
-              <a:t>Claude Code에 파일시스템, Git, 시간 서버를 연결하고 한 요청에서 조합한다</a:t>
+              <a:t>AI 코딩 도구에 파일시스템, Git, 시간 서버를 연결하고 한 요청에서 조합한다</a:t>
             </a:r>
           </a:p>
         </p:txBody>
@@ -53611,8 +53611,8 @@
         </p:nvSpPr>
         <p:spPr>
           <a:xfrm>
-            <a:off x="548640" y="2314003"/>
-            <a:ext cx="2567863" cy="3354705"/>
+            <a:off x="548640" y="2104834"/>
+            <a:ext cx="2567863" cy="3773043"/>
           </a:xfrm>
           <a:prstGeom prst="roundRect">
             <a:avLst>
@@ -53644,7 +53644,7 @@
         </p:nvSpPr>
         <p:spPr>
           <a:xfrm>
-            <a:off x="777240" y="2515171"/>
+            <a:off x="777240" y="2306002"/>
             <a:ext cx="731520" cy="731520"/>
           </a:xfrm>
           <a:prstGeom prst="ellipse">
@@ -53681,7 +53681,7 @@
         </p:blipFill>
         <p:spPr>
           <a:xfrm>
-            <a:off x="930859" y="2668790"/>
+            <a:off x="930859" y="2459621"/>
             <a:ext cx="424281" cy="424281"/>
           </a:xfrm>
           <a:prstGeom prst="rect">
@@ -53697,8 +53697,8 @@
         </p:nvSpPr>
         <p:spPr>
           <a:xfrm>
-            <a:off x="713232" y="3338131"/>
-            <a:ext cx="2238679" cy="1827657"/>
+            <a:off x="713232" y="3128962"/>
+            <a:ext cx="2238679" cy="2245995"/>
           </a:xfrm>
           <a:prstGeom prst="rect">
             <a:avLst/>
@@ -53760,7 +53760,7 @@
         </p:nvSpPr>
         <p:spPr>
           <a:xfrm>
-            <a:off x="777240" y="5238940"/>
+            <a:off x="777240" y="5448109"/>
             <a:ext cx="822960" cy="292608"/>
           </a:xfrm>
           <a:prstGeom prst="roundRect">
@@ -53791,7 +53791,7 @@
         </p:nvSpPr>
         <p:spPr>
           <a:xfrm>
-            <a:off x="777240" y="5238940"/>
+            <a:off x="777240" y="5448109"/>
             <a:ext cx="822960" cy="292608"/>
           </a:xfrm>
           <a:prstGeom prst="rect">
@@ -53830,8 +53830,8 @@
         </p:nvSpPr>
         <p:spPr>
           <a:xfrm>
-            <a:off x="3390823" y="2314003"/>
-            <a:ext cx="2567863" cy="3354705"/>
+            <a:off x="3390823" y="2104834"/>
+            <a:ext cx="2567863" cy="3773043"/>
           </a:xfrm>
           <a:prstGeom prst="roundRect">
             <a:avLst>
@@ -53863,7 +53863,7 @@
         </p:nvSpPr>
         <p:spPr>
           <a:xfrm>
-            <a:off x="3619423" y="2515171"/>
+            <a:off x="3619423" y="2306002"/>
             <a:ext cx="731520" cy="731520"/>
           </a:xfrm>
           <a:prstGeom prst="ellipse">
@@ -53900,7 +53900,7 @@
         </p:blipFill>
         <p:spPr>
           <a:xfrm>
-            <a:off x="3773043" y="2668790"/>
+            <a:off x="3773043" y="2459621"/>
             <a:ext cx="424281" cy="424281"/>
           </a:xfrm>
           <a:prstGeom prst="rect">
@@ -53916,8 +53916,8 @@
         </p:nvSpPr>
         <p:spPr>
           <a:xfrm>
-            <a:off x="3555415" y="3338131"/>
-            <a:ext cx="2238679" cy="1827657"/>
+            <a:off x="3555415" y="3128962"/>
+            <a:ext cx="2238679" cy="2245995"/>
           </a:xfrm>
           <a:prstGeom prst="rect">
             <a:avLst/>
@@ -53979,7 +53979,7 @@
         </p:nvSpPr>
         <p:spPr>
           <a:xfrm>
-            <a:off x="3619423" y="5238940"/>
+            <a:off x="3619423" y="5448109"/>
             <a:ext cx="822960" cy="292608"/>
           </a:xfrm>
           <a:prstGeom prst="roundRect">
@@ -54010,7 +54010,7 @@
         </p:nvSpPr>
         <p:spPr>
           <a:xfrm>
-            <a:off x="3619423" y="5238940"/>
+            <a:off x="3619423" y="5448109"/>
             <a:ext cx="822960" cy="292608"/>
           </a:xfrm>
           <a:prstGeom prst="rect">
@@ -54049,8 +54049,8 @@
         </p:nvSpPr>
         <p:spPr>
           <a:xfrm>
-            <a:off x="6233007" y="2314003"/>
-            <a:ext cx="2567863" cy="3354705"/>
+            <a:off x="6233007" y="2104834"/>
+            <a:ext cx="2567863" cy="3773043"/>
           </a:xfrm>
           <a:prstGeom prst="roundRect">
             <a:avLst>
@@ -54082,7 +54082,7 @@
         </p:nvSpPr>
         <p:spPr>
           <a:xfrm>
-            <a:off x="6461607" y="2515171"/>
+            <a:off x="6461607" y="2306002"/>
             <a:ext cx="731520" cy="731520"/>
           </a:xfrm>
           <a:prstGeom prst="ellipse">
@@ -54119,7 +54119,7 @@
         </p:blipFill>
         <p:spPr>
           <a:xfrm>
-            <a:off x="6615226" y="2668790"/>
+            <a:off x="6615226" y="2459621"/>
             <a:ext cx="424281" cy="424281"/>
           </a:xfrm>
           <a:prstGeom prst="rect">
@@ -54135,8 +54135,8 @@
         </p:nvSpPr>
         <p:spPr>
           <a:xfrm>
-            <a:off x="6397599" y="3338131"/>
-            <a:ext cx="2238679" cy="1827657"/>
+            <a:off x="6397599" y="3128962"/>
+            <a:ext cx="2238679" cy="2245995"/>
           </a:xfrm>
           <a:prstGeom prst="rect">
             <a:avLst/>
@@ -54198,7 +54198,7 @@
         </p:nvSpPr>
         <p:spPr>
           <a:xfrm>
-            <a:off x="6461607" y="5238940"/>
+            <a:off x="6461607" y="5448109"/>
             <a:ext cx="822960" cy="292608"/>
           </a:xfrm>
           <a:prstGeom prst="roundRect">
@@ -54229,7 +54229,7 @@
         </p:nvSpPr>
         <p:spPr>
           <a:xfrm>
-            <a:off x="6461607" y="5238940"/>
+            <a:off x="6461607" y="5448109"/>
             <a:ext cx="822960" cy="292608"/>
           </a:xfrm>
           <a:prstGeom prst="rect">
@@ -54268,8 +54268,8 @@
         </p:nvSpPr>
         <p:spPr>
           <a:xfrm>
-            <a:off x="9075191" y="2314003"/>
-            <a:ext cx="2567863" cy="3354705"/>
+            <a:off x="9075191" y="2104834"/>
+            <a:ext cx="2567863" cy="3773043"/>
           </a:xfrm>
           <a:prstGeom prst="roundRect">
             <a:avLst>
@@ -54301,7 +54301,7 @@
         </p:nvSpPr>
         <p:spPr>
           <a:xfrm>
-            <a:off x="9303791" y="2515171"/>
+            <a:off x="9303791" y="2306002"/>
             <a:ext cx="731520" cy="731520"/>
           </a:xfrm>
           <a:prstGeom prst="ellipse">
@@ -54338,7 +54338,7 @@
         </p:blipFill>
         <p:spPr>
           <a:xfrm>
-            <a:off x="9457410" y="2668790"/>
+            <a:off x="9457410" y="2459621"/>
             <a:ext cx="424281" cy="424281"/>
           </a:xfrm>
           <a:prstGeom prst="rect">
@@ -54354,8 +54354,8 @@
         </p:nvSpPr>
         <p:spPr>
           <a:xfrm>
-            <a:off x="9239783" y="3338131"/>
-            <a:ext cx="2238679" cy="1827657"/>
+            <a:off x="9239783" y="3128962"/>
+            <a:ext cx="2238679" cy="2245995"/>
           </a:xfrm>
           <a:prstGeom prst="rect">
             <a:avLst/>
@@ -54383,7 +54383,7 @@
                 <a:ea typeface="맑은 고딕"/>
                 <a:cs typeface="맑은 고딕"/>
               </a:rPr>
-              <a:t>포털과 로컬의 차이</a:t>
+              <a:t>연결 방식의 차이</a:t>
             </a:r>
           </a:p>
           <a:p>
@@ -54404,7 +54404,28 @@
                 <a:ea typeface="맑은 고딕"/>
                 <a:cs typeface="맑은 고딕"/>
               </a:rPr>
-              <a:t>포털은 등록과 연결 검사를 거쳐 서버를 붙이고, 로컬은 설정 파일에 적은 서버를 사용자가 허용해 쓴다</a:t>
+              <a:t>• HYD 포털은 등록하고 연결 검사를 통과한 MCP 서버만 에이전트에 붙인다</a:t>
+            </a:r>
+          </a:p>
+          <a:p>
+            <a:pPr algn="l">
+              <a:lnSpc>
+                <a:spcPct val="110000"/>
+              </a:lnSpc>
+              <a:spcAft>
+                <a:spcPts val="400"/>
+              </a:spcAft>
+            </a:pPr>
+            <a:r>
+              <a:rPr sz="1350" b="0">
+                <a:solidFill>
+                  <a:srgbClr val="1F2A3A"/>
+                </a:solidFill>
+                <a:latin typeface="맑은 고딕"/>
+                <a:ea typeface="맑은 고딕"/>
+                <a:cs typeface="맑은 고딕"/>
+              </a:rPr>
+              <a:t>• 내 PC의 AI 코딩 도구는 설정 파일에 적은 MCP 서버만 연결하고, 사용자가 허용해야 쓴다</a:t>
             </a:r>
           </a:p>
         </p:txBody>
@@ -54417,7 +54438,7 @@
         </p:nvSpPr>
         <p:spPr>
           <a:xfrm>
-            <a:off x="9303791" y="5238940"/>
+            <a:off x="9303791" y="5448109"/>
             <a:ext cx="822960" cy="292608"/>
           </a:xfrm>
           <a:prstGeom prst="roundRect">
@@ -54448,7 +54469,7 @@
         </p:nvSpPr>
         <p:spPr>
           <a:xfrm>
-            <a:off x="9303791" y="5238940"/>
+            <a:off x="9303791" y="5448109"/>
             <a:ext cx="822960" cy="292608"/>
           </a:xfrm>
           <a:prstGeom prst="rect">
@@ -59073,7 +59094,7 @@
       </p:sp>
       <p:pic>
         <p:nvPicPr>
-          <p:cNvPr id="6" name="삽화:고리_1.svg" descr="illust_6997948047416917338_1791735675.png"/>
+          <p:cNvPr id="6" name="삽화:고리_1.svg" descr="illust_5618421569796808369_1791735675.png"/>
           <p:cNvPicPr>
             <a:picLocks noChangeAspect="1"/>
           </p:cNvPicPr>
